--- a/presentation/finalist-presentation.pptx
+++ b/presentation/finalist-presentation.pptx
@@ -6153,14 +6153,140 @@
       </p:sp>
       <p:sp>
         <p:nvSpPr>
-          <p:cNvPr id="5" name="TextBox 4"/>
-          <p:cNvSpPr txBox="1"/>
-          <p:nvPr/>
-        </p:nvSpPr>
-        <p:spPr>
-          <a:xfrm>
-            <a:off x="640080" y="1737360"/>
-            <a:ext cx="5486400" cy="3291840"/>
+          <p:cNvPr id="5" name="Rounded Rectangle 4"/>
+          <p:cNvSpPr/>
+          <p:nvPr/>
+        </p:nvSpPr>
+        <p:spPr>
+          <a:xfrm>
+            <a:off x="640080" y="1600200"/>
+            <a:ext cx="5212080" cy="2148840"/>
+          </a:xfrm>
+          <a:prstGeom prst="roundRect">
+            <a:avLst>
+              <a:gd name="adj" fmla="val 4000"/>
+            </a:avLst>
+          </a:prstGeom>
+          <a:solidFill>
+            <a:srgbClr val="FFFFFF"/>
+          </a:solidFill>
+          <a:ln w="12700">
+            <a:solidFill>
+              <a:srgbClr val="D2D2D7"/>
+            </a:solidFill>
+          </a:ln>
+          <a:effectLst/>
+        </p:spPr>
+        <p:style>
+          <a:lnRef idx="1">
+            <a:schemeClr val="accent1"/>
+          </a:lnRef>
+          <a:fillRef idx="3">
+            <a:schemeClr val="accent1"/>
+          </a:fillRef>
+          <a:effectRef idx="2">
+            <a:schemeClr val="accent1"/>
+          </a:effectRef>
+          <a:fontRef idx="minor">
+            <a:schemeClr val="lt1"/>
+          </a:fontRef>
+        </p:style>
+        <p:txBody>
+          <a:bodyPr rtlCol="0" anchor="ctr"/>
+          <a:lstStyle/>
+          <a:p>
+            <a:pPr algn="ctr"/>
+          </a:p>
+        </p:txBody>
+      </p:sp>
+      <p:sp>
+        <p:nvSpPr>
+          <p:cNvPr id="6" name="TextBox 5"/>
+          <p:cNvSpPr txBox="1"/>
+          <p:nvPr/>
+        </p:nvSpPr>
+        <p:spPr>
+          <a:xfrm>
+            <a:off x="841248" y="1728216"/>
+            <a:ext cx="914400" cy="457200"/>
+          </a:xfrm>
+          <a:prstGeom prst="rect">
+            <a:avLst/>
+          </a:prstGeom>
+          <a:noFill/>
+        </p:spPr>
+        <p:txBody>
+          <a:bodyPr wrap="square" anchor="t" lIns="0" rIns="0" tIns="0" bIns="0">
+            <a:spAutoFit/>
+          </a:bodyPr>
+          <a:lstStyle/>
+          <a:p>
+            <a:pPr algn="l">
+              <a:lnSpc>
+                <a:spcPct val="100000"/>
+              </a:lnSpc>
+            </a:pPr>
+            <a:r>
+              <a:rPr sz="3000" b="1" i="0">
+                <a:solidFill>
+                  <a:srgbClr val="D2D2D7"/>
+                </a:solidFill>
+                <a:latin typeface="Helvetica Neue"/>
+              </a:rPr>
+              <a:t>01</a:t>
+            </a:r>
+          </a:p>
+        </p:txBody>
+      </p:sp>
+      <p:sp>
+        <p:nvSpPr>
+          <p:cNvPr id="7" name="TextBox 6"/>
+          <p:cNvSpPr txBox="1"/>
+          <p:nvPr/>
+        </p:nvSpPr>
+        <p:spPr>
+          <a:xfrm>
+            <a:off x="841248" y="2167128"/>
+            <a:ext cx="4809744" cy="365760"/>
+          </a:xfrm>
+          <a:prstGeom prst="rect">
+            <a:avLst/>
+          </a:prstGeom>
+          <a:noFill/>
+        </p:spPr>
+        <p:txBody>
+          <a:bodyPr wrap="square" anchor="t" lIns="0" rIns="0" tIns="0" bIns="0">
+            <a:spAutoFit/>
+          </a:bodyPr>
+          <a:lstStyle/>
+          <a:p>
+            <a:pPr algn="l">
+              <a:lnSpc>
+                <a:spcPct val="100000"/>
+              </a:lnSpc>
+            </a:pPr>
+            <a:r>
+              <a:rPr sz="1700" b="1" i="0">
+                <a:solidFill>
+                  <a:srgbClr val="1D1D1F"/>
+                </a:solidFill>
+                <a:latin typeface="Helvetica Neue"/>
+              </a:rPr>
+              <a:t>Repayment Status</a:t>
+            </a:r>
+          </a:p>
+        </p:txBody>
+      </p:sp>
+      <p:sp>
+        <p:nvSpPr>
+          <p:cNvPr id="8" name="TextBox 7"/>
+          <p:cNvSpPr txBox="1"/>
+          <p:nvPr/>
+        </p:nvSpPr>
+        <p:spPr>
+          <a:xfrm>
+            <a:off x="841248" y="2560320"/>
+            <a:ext cx="4809744" cy="1051560"/>
           </a:xfrm>
           <a:prstGeom prst="rect">
             <a:avLst/>
@@ -6178,17 +6304,17 @@
                 <a:spcPct val="108000"/>
               </a:lnSpc>
               <a:spcAft>
-                <a:spcPts val="900"/>
+                <a:spcPts val="700"/>
               </a:spcAft>
             </a:pPr>
             <a:r>
-              <a:rPr sz="1650">
+              <a:rPr sz="1150">
                 <a:solidFill>
                   <a:srgbClr val="1D1D1F"/>
                 </a:solidFill>
                 <a:latin typeface="Helvetica Neue"/>
               </a:rPr>
-              <a:t>-  No missing values and no malformed rows in the raw data.</a:t>
+              <a:t>-  PAY_0, PAY_2 through PAY_6 show months behind on payment.</a:t>
             </a:r>
           </a:p>
           <a:p>
@@ -6197,17 +6323,17 @@
                 <a:spcPct val="108000"/>
               </a:lnSpc>
               <a:spcAft>
-                <a:spcPts val="900"/>
+                <a:spcPts val="700"/>
               </a:spcAft>
             </a:pPr>
             <a:r>
-              <a:rPr sz="1650">
+              <a:rPr sz="1150">
                 <a:solidFill>
                   <a:srgbClr val="1D1D1F"/>
                 </a:solidFill>
                 <a:latin typeface="Helvetica Neue"/>
               </a:rPr>
-              <a:t>-  EDUCATION codes 0, 5, 6 grouped into "other", 290 rows.</a:t>
+              <a:t>-  -2 = no balance, -1 = paid in full, 0 = paid minimum amount.</a:t>
             </a:r>
           </a:p>
           <a:p>
@@ -6216,17 +6342,17 @@
                 <a:spcPct val="108000"/>
               </a:lnSpc>
               <a:spcAft>
-                <a:spcPts val="900"/>
+                <a:spcPts val="700"/>
               </a:spcAft>
             </a:pPr>
             <a:r>
-              <a:rPr sz="1650">
+              <a:rPr sz="1150">
                 <a:solidFill>
                   <a:srgbClr val="1D1D1F"/>
                 </a:solidFill>
                 <a:latin typeface="Helvetica Neue"/>
               </a:rPr>
-              <a:t>-  MARRIAGE code 0 grouped into "other", 42 rows.</a:t>
+              <a:t>-  Raw values stay untouched in the cleaned dataset, no grouping here.</a:t>
             </a:r>
           </a:p>
           <a:p>
@@ -6235,17 +6361,17 @@
                 <a:spcPct val="108000"/>
               </a:lnSpc>
               <a:spcAft>
-                <a:spcPts val="900"/>
+                <a:spcPts val="700"/>
               </a:spcAft>
             </a:pPr>
             <a:r>
-              <a:rPr sz="1650">
+              <a:rPr sz="1150">
                 <a:solidFill>
                   <a:srgbClr val="1D1D1F"/>
                 </a:solidFill>
                 <a:latin typeface="Helvetica Neue"/>
               </a:rPr>
-              <a:t>-  PAY status −1 and −2 kept as-is: paid-in-full and inactive account, not missing data.</a:t>
+              <a:t>-  Aggregate lateness features (pay_max, n_late, trend_pay) clip -2/-1/0 to 0 only.</a:t>
             </a:r>
           </a:p>
           <a:p>
@@ -6254,74 +6380,304 @@
                 <a:spcPct val="108000"/>
               </a:lnSpc>
               <a:spcAft>
-                <a:spcPts val="900"/>
+                <a:spcPts val="700"/>
               </a:spcAft>
             </a:pPr>
             <a:r>
-              <a:rPr sz="1650">
+              <a:rPr sz="1150">
                 <a:solidFill>
                   <a:srgbClr val="1D1D1F"/>
                 </a:solidFill>
                 <a:latin typeface="Helvetica Neue"/>
               </a:rPr>
-              <a:t>-  No outlier removal, large balances/payments can be genuine risk signal.</a:t>
-            </a:r>
-          </a:p>
+              <a:t>-  ever_paid_full and never_used deliberately keep the original codes.</a:t>
+            </a:r>
+          </a:p>
+        </p:txBody>
+      </p:sp>
+      <p:sp>
+        <p:nvSpPr>
+          <p:cNvPr id="9" name="Rounded Rectangle 8"/>
+          <p:cNvSpPr/>
+          <p:nvPr/>
+        </p:nvSpPr>
+        <p:spPr>
+          <a:xfrm>
+            <a:off x="6126480" y="1600200"/>
+            <a:ext cx="5212080" cy="2148840"/>
+          </a:xfrm>
+          <a:prstGeom prst="roundRect">
+            <a:avLst>
+              <a:gd name="adj" fmla="val 4000"/>
+            </a:avLst>
+          </a:prstGeom>
+          <a:solidFill>
+            <a:srgbClr val="FFFFFF"/>
+          </a:solidFill>
+          <a:ln w="12700">
+            <a:solidFill>
+              <a:srgbClr val="D2D2D7"/>
+            </a:solidFill>
+          </a:ln>
+          <a:effectLst/>
+        </p:spPr>
+        <p:style>
+          <a:lnRef idx="1">
+            <a:schemeClr val="accent1"/>
+          </a:lnRef>
+          <a:fillRef idx="3">
+            <a:schemeClr val="accent1"/>
+          </a:fillRef>
+          <a:effectRef idx="2">
+            <a:schemeClr val="accent1"/>
+          </a:effectRef>
+          <a:fontRef idx="minor">
+            <a:schemeClr val="lt1"/>
+          </a:fontRef>
+        </p:style>
+        <p:txBody>
+          <a:bodyPr rtlCol="0" anchor="ctr"/>
+          <a:lstStyle/>
+          <a:p>
+            <a:pPr algn="ctr"/>
+          </a:p>
+        </p:txBody>
+      </p:sp>
+      <p:sp>
+        <p:nvSpPr>
+          <p:cNvPr id="10" name="TextBox 9"/>
+          <p:cNvSpPr txBox="1"/>
+          <p:nvPr/>
+        </p:nvSpPr>
+        <p:spPr>
+          <a:xfrm>
+            <a:off x="6327648" y="1728216"/>
+            <a:ext cx="914400" cy="457200"/>
+          </a:xfrm>
+          <a:prstGeom prst="rect">
+            <a:avLst/>
+          </a:prstGeom>
+          <a:noFill/>
+        </p:spPr>
+        <p:txBody>
+          <a:bodyPr wrap="square" anchor="t" lIns="0" rIns="0" tIns="0" bIns="0">
+            <a:spAutoFit/>
+          </a:bodyPr>
+          <a:lstStyle/>
+          <a:p>
+            <a:pPr algn="l">
+              <a:lnSpc>
+                <a:spcPct val="100000"/>
+              </a:lnSpc>
+            </a:pPr>
+            <a:r>
+              <a:rPr sz="3000" b="1" i="0">
+                <a:solidFill>
+                  <a:srgbClr val="D2D2D7"/>
+                </a:solidFill>
+                <a:latin typeface="Helvetica Neue"/>
+              </a:rPr>
+              <a:t>02</a:t>
+            </a:r>
+          </a:p>
+        </p:txBody>
+      </p:sp>
+      <p:sp>
+        <p:nvSpPr>
+          <p:cNvPr id="11" name="TextBox 10"/>
+          <p:cNvSpPr txBox="1"/>
+          <p:nvPr/>
+        </p:nvSpPr>
+        <p:spPr>
+          <a:xfrm>
+            <a:off x="6327648" y="2167128"/>
+            <a:ext cx="4809744" cy="365760"/>
+          </a:xfrm>
+          <a:prstGeom prst="rect">
+            <a:avLst/>
+          </a:prstGeom>
+          <a:noFill/>
+        </p:spPr>
+        <p:txBody>
+          <a:bodyPr wrap="square" anchor="t" lIns="0" rIns="0" tIns="0" bIns="0">
+            <a:spAutoFit/>
+          </a:bodyPr>
+          <a:lstStyle/>
+          <a:p>
+            <a:pPr algn="l">
+              <a:lnSpc>
+                <a:spcPct val="100000"/>
+              </a:lnSpc>
+            </a:pPr>
+            <a:r>
+              <a:rPr sz="1700" b="1" i="0">
+                <a:solidFill>
+                  <a:srgbClr val="CB382D"/>
+                </a:solidFill>
+                <a:latin typeface="Helvetica Neue"/>
+              </a:rPr>
+              <a:t>Education</a:t>
+            </a:r>
+          </a:p>
+        </p:txBody>
+      </p:sp>
+      <p:sp>
+        <p:nvSpPr>
+          <p:cNvPr id="12" name="TextBox 11"/>
+          <p:cNvSpPr txBox="1"/>
+          <p:nvPr/>
+        </p:nvSpPr>
+        <p:spPr>
+          <a:xfrm>
+            <a:off x="6327648" y="2560320"/>
+            <a:ext cx="4809744" cy="1051560"/>
+          </a:xfrm>
+          <a:prstGeom prst="rect">
+            <a:avLst/>
+          </a:prstGeom>
+          <a:noFill/>
+        </p:spPr>
+        <p:txBody>
+          <a:bodyPr wrap="square" lIns="0" rIns="0" tIns="0" bIns="0">
+            <a:spAutoFit/>
+          </a:bodyPr>
+          <a:lstStyle/>
           <a:p>
             <a:pPr>
               <a:lnSpc>
                 <a:spcPct val="108000"/>
               </a:lnSpc>
               <a:spcAft>
-                <a:spcPts val="900"/>
+                <a:spcPts val="700"/>
               </a:spcAft>
             </a:pPr>
             <a:r>
-              <a:rPr sz="1650">
+              <a:rPr sz="1150">
                 <a:solidFill>
                   <a:srgbClr val="1D1D1F"/>
                 </a:solidFill>
                 <a:latin typeface="Helvetica Neue"/>
               </a:rPr>
-              <a:t>-  No resampling or class weighting, preserves the true 22.12% base rate for calibration.</a:t>
-            </a:r>
-          </a:p>
-        </p:txBody>
-      </p:sp>
-      <p:pic>
-        <p:nvPicPr>
-          <p:cNvPr id="6" name="Picture 5" descr="cleaning_flow.png"/>
-          <p:cNvPicPr>
-            <a:picLocks noChangeAspect="1"/>
-          </p:cNvPicPr>
-          <p:nvPr/>
-        </p:nvPicPr>
-        <p:blipFill>
-          <a:blip r:embed="rId2"/>
-          <a:stretch>
-            <a:fillRect/>
-          </a:stretch>
-        </p:blipFill>
-        <p:spPr>
-          <a:xfrm>
-            <a:off x="6858000" y="2180844"/>
-            <a:ext cx="4709160" cy="941832"/>
-          </a:xfrm>
-          <a:prstGeom prst="rect">
-            <a:avLst/>
-          </a:prstGeom>
-        </p:spPr>
-      </p:pic>
-      <p:sp>
-        <p:nvSpPr>
-          <p:cNvPr id="7" name="TextBox 6"/>
-          <p:cNvSpPr txBox="1"/>
-          <p:nvPr/>
-        </p:nvSpPr>
-        <p:spPr>
-          <a:xfrm>
-            <a:off x="640080" y="5989320"/>
-            <a:ext cx="10881360" cy="548640"/>
+              <a:t>-  1 = graduate school, 2 = university, 3 = high school, 4 = other (official codes).</a:t>
+            </a:r>
+          </a:p>
+          <a:p>
+            <a:pPr>
+              <a:lnSpc>
+                <a:spcPct val="108000"/>
+              </a:lnSpc>
+              <a:spcAft>
+                <a:spcPts val="700"/>
+              </a:spcAft>
+            </a:pPr>
+            <a:r>
+              <a:rPr sz="1150">
+                <a:solidFill>
+                  <a:srgbClr val="1D1D1F"/>
+                </a:solidFill>
+                <a:latin typeface="Helvetica Neue"/>
+              </a:rPr>
+              <a:t>-  Undocumented codes 0, 5, 6 folded into "other" (4), 290 rows.</a:t>
+            </a:r>
+          </a:p>
+          <a:p>
+            <a:pPr>
+              <a:lnSpc>
+                <a:spcPct val="108000"/>
+              </a:lnSpc>
+              <a:spcAft>
+                <a:spcPts val="700"/>
+              </a:spcAft>
+            </a:pPr>
+            <a:r>
+              <a:rPr sz="1150">
+                <a:solidFill>
+                  <a:srgbClr val="1D1D1F"/>
+                </a:solidFill>
+                <a:latin typeface="Helvetica Neue"/>
+              </a:rPr>
+              <a:t>-  Confirmed cost: "other" over-predicted about 61%, AUC 0.645 vs about 0.79 elsewhere.</a:t>
+            </a:r>
+          </a:p>
+          <a:p>
+            <a:pPr>
+              <a:lnSpc>
+                <a:spcPct val="108000"/>
+              </a:lnSpc>
+              <a:spcAft>
+                <a:spcPts val="700"/>
+              </a:spcAft>
+            </a:pPr>
+            <a:r>
+              <a:rPr sz="1150">
+                <a:solidFill>
+                  <a:srgbClr val="1D1D1F"/>
+                </a:solidFill>
+                <a:latin typeface="Helvetica Neue"/>
+              </a:rPr>
+              <a:t>-  The only subgroup where the model underperforms its own base rate.</a:t>
+            </a:r>
+          </a:p>
+        </p:txBody>
+      </p:sp>
+      <p:sp>
+        <p:nvSpPr>
+          <p:cNvPr id="13" name="Rounded Rectangle 12"/>
+          <p:cNvSpPr/>
+          <p:nvPr/>
+        </p:nvSpPr>
+        <p:spPr>
+          <a:xfrm>
+            <a:off x="640080" y="3977640"/>
+            <a:ext cx="5212080" cy="2148840"/>
+          </a:xfrm>
+          <a:prstGeom prst="roundRect">
+            <a:avLst>
+              <a:gd name="adj" fmla="val 4000"/>
+            </a:avLst>
+          </a:prstGeom>
+          <a:solidFill>
+            <a:srgbClr val="FFFFFF"/>
+          </a:solidFill>
+          <a:ln w="12700">
+            <a:solidFill>
+              <a:srgbClr val="D2D2D7"/>
+            </a:solidFill>
+          </a:ln>
+          <a:effectLst/>
+        </p:spPr>
+        <p:style>
+          <a:lnRef idx="1">
+            <a:schemeClr val="accent1"/>
+          </a:lnRef>
+          <a:fillRef idx="3">
+            <a:schemeClr val="accent1"/>
+          </a:fillRef>
+          <a:effectRef idx="2">
+            <a:schemeClr val="accent1"/>
+          </a:effectRef>
+          <a:fontRef idx="minor">
+            <a:schemeClr val="lt1"/>
+          </a:fontRef>
+        </p:style>
+        <p:txBody>
+          <a:bodyPr rtlCol="0" anchor="ctr"/>
+          <a:lstStyle/>
+          <a:p>
+            <a:pPr algn="ctr"/>
+          </a:p>
+        </p:txBody>
+      </p:sp>
+      <p:sp>
+        <p:nvSpPr>
+          <p:cNvPr id="14" name="TextBox 13"/>
+          <p:cNvSpPr txBox="1"/>
+          <p:nvPr/>
+        </p:nvSpPr>
+        <p:spPr>
+          <a:xfrm>
+            <a:off x="841248" y="4105656"/>
+            <a:ext cx="914400" cy="457200"/>
           </a:xfrm>
           <a:prstGeom prst="rect">
             <a:avLst/>
@@ -6340,20 +6696,364 @@
               </a:lnSpc>
             </a:pPr>
             <a:r>
-              <a:rPr sz="1500" b="0" i="1">
-                <a:solidFill>
-                  <a:srgbClr val="6E6E73"/>
-                </a:solidFill>
-                <a:latin typeface="Helvetica Neue"/>
-              </a:rPr>
-              <a:t>Preprocessing preserved meaningful financial states instead of applying generic cleaning steps.</a:t>
-            </a:r>
-          </a:p>
-        </p:txBody>
-      </p:sp>
-      <p:sp>
-        <p:nvSpPr>
-          <p:cNvPr id="8" name="TextBox 7"/>
+              <a:rPr sz="3000" b="1" i="0">
+                <a:solidFill>
+                  <a:srgbClr val="D2D2D7"/>
+                </a:solidFill>
+                <a:latin typeface="Helvetica Neue"/>
+              </a:rPr>
+              <a:t>03</a:t>
+            </a:r>
+          </a:p>
+        </p:txBody>
+      </p:sp>
+      <p:sp>
+        <p:nvSpPr>
+          <p:cNvPr id="15" name="TextBox 14"/>
+          <p:cNvSpPr txBox="1"/>
+          <p:nvPr/>
+        </p:nvSpPr>
+        <p:spPr>
+          <a:xfrm>
+            <a:off x="841248" y="4544568"/>
+            <a:ext cx="4809744" cy="365760"/>
+          </a:xfrm>
+          <a:prstGeom prst="rect">
+            <a:avLst/>
+          </a:prstGeom>
+          <a:noFill/>
+        </p:spPr>
+        <p:txBody>
+          <a:bodyPr wrap="square" anchor="t" lIns="0" rIns="0" tIns="0" bIns="0">
+            <a:spAutoFit/>
+          </a:bodyPr>
+          <a:lstStyle/>
+          <a:p>
+            <a:pPr algn="l">
+              <a:lnSpc>
+                <a:spcPct val="100000"/>
+              </a:lnSpc>
+            </a:pPr>
+            <a:r>
+              <a:rPr sz="1700" b="1" i="0">
+                <a:solidFill>
+                  <a:srgbClr val="1D1D1F"/>
+                </a:solidFill>
+                <a:latin typeface="Helvetica Neue"/>
+              </a:rPr>
+              <a:t>Marriage</a:t>
+            </a:r>
+          </a:p>
+        </p:txBody>
+      </p:sp>
+      <p:sp>
+        <p:nvSpPr>
+          <p:cNvPr id="16" name="TextBox 15"/>
+          <p:cNvSpPr txBox="1"/>
+          <p:nvPr/>
+        </p:nvSpPr>
+        <p:spPr>
+          <a:xfrm>
+            <a:off x="841248" y="4937760"/>
+            <a:ext cx="4809744" cy="1051560"/>
+          </a:xfrm>
+          <a:prstGeom prst="rect">
+            <a:avLst/>
+          </a:prstGeom>
+          <a:noFill/>
+        </p:spPr>
+        <p:txBody>
+          <a:bodyPr wrap="square" lIns="0" rIns="0" tIns="0" bIns="0">
+            <a:spAutoFit/>
+          </a:bodyPr>
+          <a:lstStyle/>
+          <a:p>
+            <a:pPr>
+              <a:lnSpc>
+                <a:spcPct val="108000"/>
+              </a:lnSpc>
+              <a:spcAft>
+                <a:spcPts val="700"/>
+              </a:spcAft>
+            </a:pPr>
+            <a:r>
+              <a:rPr sz="1150">
+                <a:solidFill>
+                  <a:srgbClr val="1D1D1F"/>
+                </a:solidFill>
+                <a:latin typeface="Helvetica Neue"/>
+              </a:rPr>
+              <a:t>-  1 = married, 2 = single, 3 = other (official codes).</a:t>
+            </a:r>
+          </a:p>
+          <a:p>
+            <a:pPr>
+              <a:lnSpc>
+                <a:spcPct val="108000"/>
+              </a:lnSpc>
+              <a:spcAft>
+                <a:spcPts val="700"/>
+              </a:spcAft>
+            </a:pPr>
+            <a:r>
+              <a:rPr sz="1150">
+                <a:solidFill>
+                  <a:srgbClr val="1D1D1F"/>
+                </a:solidFill>
+                <a:latin typeface="Helvetica Neue"/>
+              </a:rPr>
+              <a:t>-  Undocumented code 0 folded into "other" (3), 42 rows.</a:t>
+            </a:r>
+          </a:p>
+          <a:p>
+            <a:pPr>
+              <a:lnSpc>
+                <a:spcPct val="108000"/>
+              </a:lnSpc>
+              <a:spcAft>
+                <a:spcPts val="700"/>
+              </a:spcAft>
+            </a:pPr>
+            <a:r>
+              <a:rPr sz="1150">
+                <a:solidFill>
+                  <a:srgbClr val="1D1D1F"/>
+                </a:solidFill>
+                <a:latin typeface="Helvetica Neue"/>
+              </a:rPr>
+              <a:t>-  No confirmed fairness or accuracy issue for this group.</a:t>
+            </a:r>
+          </a:p>
+        </p:txBody>
+      </p:sp>
+      <p:sp>
+        <p:nvSpPr>
+          <p:cNvPr id="17" name="Rounded Rectangle 16"/>
+          <p:cNvSpPr/>
+          <p:nvPr/>
+        </p:nvSpPr>
+        <p:spPr>
+          <a:xfrm>
+            <a:off x="6126480" y="3977640"/>
+            <a:ext cx="5212080" cy="2148840"/>
+          </a:xfrm>
+          <a:prstGeom prst="roundRect">
+            <a:avLst>
+              <a:gd name="adj" fmla="val 4000"/>
+            </a:avLst>
+          </a:prstGeom>
+          <a:solidFill>
+            <a:srgbClr val="FFFFFF"/>
+          </a:solidFill>
+          <a:ln w="12700">
+            <a:solidFill>
+              <a:srgbClr val="D2D2D7"/>
+            </a:solidFill>
+          </a:ln>
+          <a:effectLst/>
+        </p:spPr>
+        <p:style>
+          <a:lnRef idx="1">
+            <a:schemeClr val="accent1"/>
+          </a:lnRef>
+          <a:fillRef idx="3">
+            <a:schemeClr val="accent1"/>
+          </a:fillRef>
+          <a:effectRef idx="2">
+            <a:schemeClr val="accent1"/>
+          </a:effectRef>
+          <a:fontRef idx="minor">
+            <a:schemeClr val="lt1"/>
+          </a:fontRef>
+        </p:style>
+        <p:txBody>
+          <a:bodyPr rtlCol="0" anchor="ctr"/>
+          <a:lstStyle/>
+          <a:p>
+            <a:pPr algn="ctr"/>
+          </a:p>
+        </p:txBody>
+      </p:sp>
+      <p:sp>
+        <p:nvSpPr>
+          <p:cNvPr id="18" name="TextBox 17"/>
+          <p:cNvSpPr txBox="1"/>
+          <p:nvPr/>
+        </p:nvSpPr>
+        <p:spPr>
+          <a:xfrm>
+            <a:off x="6327648" y="4105656"/>
+            <a:ext cx="914400" cy="457200"/>
+          </a:xfrm>
+          <a:prstGeom prst="rect">
+            <a:avLst/>
+          </a:prstGeom>
+          <a:noFill/>
+        </p:spPr>
+        <p:txBody>
+          <a:bodyPr wrap="square" anchor="t" lIns="0" rIns="0" tIns="0" bIns="0">
+            <a:spAutoFit/>
+          </a:bodyPr>
+          <a:lstStyle/>
+          <a:p>
+            <a:pPr algn="l">
+              <a:lnSpc>
+                <a:spcPct val="100000"/>
+              </a:lnSpc>
+            </a:pPr>
+            <a:r>
+              <a:rPr sz="3000" b="1" i="0">
+                <a:solidFill>
+                  <a:srgbClr val="D2D2D7"/>
+                </a:solidFill>
+                <a:latin typeface="Helvetica Neue"/>
+              </a:rPr>
+              <a:t>04</a:t>
+            </a:r>
+          </a:p>
+        </p:txBody>
+      </p:sp>
+      <p:sp>
+        <p:nvSpPr>
+          <p:cNvPr id="19" name="TextBox 18"/>
+          <p:cNvSpPr txBox="1"/>
+          <p:nvPr/>
+        </p:nvSpPr>
+        <p:spPr>
+          <a:xfrm>
+            <a:off x="6327648" y="4544568"/>
+            <a:ext cx="4809744" cy="365760"/>
+          </a:xfrm>
+          <a:prstGeom prst="rect">
+            <a:avLst/>
+          </a:prstGeom>
+          <a:noFill/>
+        </p:spPr>
+        <p:txBody>
+          <a:bodyPr wrap="square" anchor="t" lIns="0" rIns="0" tIns="0" bIns="0">
+            <a:spAutoFit/>
+          </a:bodyPr>
+          <a:lstStyle/>
+          <a:p>
+            <a:pPr algn="l">
+              <a:lnSpc>
+                <a:spcPct val="100000"/>
+              </a:lnSpc>
+            </a:pPr>
+            <a:r>
+              <a:rPr sz="1700" b="1" i="0">
+                <a:solidFill>
+                  <a:srgbClr val="1D1D1F"/>
+                </a:solidFill>
+                <a:latin typeface="Helvetica Neue"/>
+              </a:rPr>
+              <a:t>What We Didn't Clean</a:t>
+            </a:r>
+          </a:p>
+        </p:txBody>
+      </p:sp>
+      <p:sp>
+        <p:nvSpPr>
+          <p:cNvPr id="20" name="TextBox 19"/>
+          <p:cNvSpPr txBox="1"/>
+          <p:nvPr/>
+        </p:nvSpPr>
+        <p:spPr>
+          <a:xfrm>
+            <a:off x="6327648" y="4937760"/>
+            <a:ext cx="4809744" cy="1051560"/>
+          </a:xfrm>
+          <a:prstGeom prst="rect">
+            <a:avLst/>
+          </a:prstGeom>
+          <a:noFill/>
+        </p:spPr>
+        <p:txBody>
+          <a:bodyPr wrap="square" lIns="0" rIns="0" tIns="0" bIns="0">
+            <a:spAutoFit/>
+          </a:bodyPr>
+          <a:lstStyle/>
+          <a:p>
+            <a:pPr>
+              <a:lnSpc>
+                <a:spcPct val="108000"/>
+              </a:lnSpc>
+              <a:spcAft>
+                <a:spcPts val="700"/>
+              </a:spcAft>
+            </a:pPr>
+            <a:r>
+              <a:rPr sz="1150">
+                <a:solidFill>
+                  <a:srgbClr val="1D1D1F"/>
+                </a:solidFill>
+                <a:latin typeface="Helvetica Neue"/>
+              </a:rPr>
+              <a:t>-  Zero missing values, no malformed rows, confirmed directly across all 24,000 rows.</a:t>
+            </a:r>
+          </a:p>
+          <a:p>
+            <a:pPr>
+              <a:lnSpc>
+                <a:spcPct val="108000"/>
+              </a:lnSpc>
+              <a:spcAft>
+                <a:spcPts val="700"/>
+              </a:spcAft>
+            </a:pPr>
+            <a:r>
+              <a:rPr sz="1150">
+                <a:solidFill>
+                  <a:srgbClr val="1D1D1F"/>
+                </a:solidFill>
+                <a:latin typeface="Helvetica Neue"/>
+              </a:rPr>
+              <a:t>-  No outlier removal: large balances and payments can be genuine risk signal.</a:t>
+            </a:r>
+          </a:p>
+          <a:p>
+            <a:pPr>
+              <a:lnSpc>
+                <a:spcPct val="108000"/>
+              </a:lnSpc>
+              <a:spcAft>
+                <a:spcPts val="700"/>
+              </a:spcAft>
+            </a:pPr>
+            <a:r>
+              <a:rPr sz="1150">
+                <a:solidFill>
+                  <a:srgbClr val="1D1D1F"/>
+                </a:solidFill>
+                <a:latin typeface="Helvetica Neue"/>
+              </a:rPr>
+              <a:t>-  No resampling or class weighting: preserves the true 22.12% base rate for calibration.</a:t>
+            </a:r>
+          </a:p>
+          <a:p>
+            <a:pPr>
+              <a:lnSpc>
+                <a:spcPct val="108000"/>
+              </a:lnSpc>
+              <a:spcAft>
+                <a:spcPts val="700"/>
+              </a:spcAft>
+            </a:pPr>
+            <a:r>
+              <a:rPr sz="1150">
+                <a:solidFill>
+                  <a:srgbClr val="1D1D1F"/>
+                </a:solidFill>
+                <a:latin typeface="Helvetica Neue"/>
+              </a:rPr>
+              <a:t>-  client_id dropped as a non-informative identifier.</a:t>
+            </a:r>
+          </a:p>
+        </p:txBody>
+      </p:sp>
+      <p:sp>
+        <p:nvSpPr>
+          <p:cNvPr id="21" name="TextBox 20"/>
           <p:cNvSpPr txBox="1"/>
           <p:nvPr/>
         </p:nvSpPr>

--- a/presentation/finalist-presentation.pptx
+++ b/presentation/finalist-presentation.pptx
@@ -7348,8 +7348,8 @@
         </p:blipFill>
         <p:spPr>
           <a:xfrm>
-            <a:off x="6420113" y="3977639"/>
-            <a:ext cx="4990573" cy="2514600"/>
+            <a:off x="6349238" y="3977639"/>
+            <a:ext cx="5132322" cy="2514600"/>
           </a:xfrm>
           <a:prstGeom prst="rect">
             <a:avLst/>

--- a/presentation/finalist-presentation.pptx
+++ b/presentation/finalist-presentation.pptx
@@ -20,6 +20,7 @@
     <p:sldId id="268" r:id="rId20"/>
     <p:sldId id="269" r:id="rId21"/>
     <p:sldId id="270" r:id="rId22"/>
+    <p:sldId id="271" r:id="rId23"/>
   </p:sldIdLst>
   <p:sldSz cx="12191695" cy="6858000" type="screen4x3"/>
   <p:notesSz cx="6858000" cy="9144000"/>
@@ -6019,7 +6020,7 @@
 </p:sld>
 </file>
 
-<file path=ppt/slides/slide2.xml><?xml version="1.0" encoding="utf-8"?>
+<file path=ppt/slides/slide16.xml><?xml version="1.0" encoding="utf-8"?>
 <p:sld xmlns:a="http://schemas.openxmlformats.org/drawingml/2006/main" xmlns:p="http://schemas.openxmlformats.org/presentationml/2006/main" xmlns:r="http://schemas.openxmlformats.org/officeDocument/2006/relationships">
   <p:cSld>
     <p:spTree>
@@ -6081,8 +6082,8 @@
         </p:nvSpPr>
         <p:spPr>
           <a:xfrm>
-            <a:off x="640080" y="502920"/>
-            <a:ext cx="7315200" cy="365760"/>
+            <a:off x="640080" y="457200"/>
+            <a:ext cx="5486400" cy="365760"/>
           </a:xfrm>
           <a:prstGeom prst="rect">
             <a:avLst/>
@@ -6101,13 +6102,13 @@
               </a:lnSpc>
             </a:pPr>
             <a:r>
-              <a:rPr sz="1300" b="1" i="0">
+              <a:rPr sz="1250" b="1" i="0">
                 <a:solidFill>
                   <a:srgbClr val="0071E3"/>
                 </a:solidFill>
                 <a:latin typeface="Helvetica Neue"/>
               </a:rPr>
-              <a:t>PREPARATION</a:t>
+              <a:t>APPENDIX · A8</a:t>
             </a:r>
           </a:p>
         </p:txBody>
@@ -6120,7 +6121,7 @@
         </p:nvSpPr>
         <p:spPr>
           <a:xfrm>
-            <a:off x="640080" y="822960"/>
+            <a:off x="640080" y="777240"/>
             <a:ext cx="10881360" cy="914400"/>
           </a:xfrm>
           <a:prstGeom prst="rect">
@@ -6140,40 +6141,210 @@
               </a:lnSpc>
             </a:pPr>
             <a:r>
-              <a:rPr sz="3400" b="1" i="0">
+              <a:rPr sz="2800" b="1" i="0">
                 <a:solidFill>
                   <a:srgbClr val="1D1D1F"/>
                 </a:solidFill>
                 <a:latin typeface="Helvetica Neue"/>
               </a:rPr>
-              <a:t>Data Cleaning</a:t>
-            </a:r>
-          </a:p>
-        </p:txBody>
-      </p:sp>
-      <p:sp>
-        <p:nvSpPr>
-          <p:cNvPr id="5" name="Rounded Rectangle 4"/>
+              <a:t>Full feature engineering breakdown, all six families</a:t>
+            </a:r>
+          </a:p>
+        </p:txBody>
+      </p:sp>
+      <p:sp>
+        <p:nvSpPr>
+          <p:cNvPr id="5" name="TextBox 4"/>
+          <p:cNvSpPr txBox="1"/>
+          <p:nvPr/>
+        </p:nvSpPr>
+        <p:spPr>
+          <a:xfrm>
+            <a:off x="640080" y="1645920"/>
+            <a:ext cx="10911535" cy="4754880"/>
+          </a:xfrm>
+          <a:prstGeom prst="rect">
+            <a:avLst/>
+          </a:prstGeom>
+          <a:noFill/>
+        </p:spPr>
+        <p:txBody>
+          <a:bodyPr wrap="square" lIns="0" rIns="0" tIns="0" bIns="0">
+            <a:spAutoFit/>
+          </a:bodyPr>
+          <a:lstStyle/>
+          <a:p>
+            <a:pPr>
+              <a:lnSpc>
+                <a:spcPct val="108000"/>
+              </a:lnSpc>
+              <a:spcAft>
+                <a:spcPts val="1000"/>
+              </a:spcAft>
+            </a:pPr>
+            <a:r>
+              <a:rPr sz="1400">
+                <a:solidFill>
+                  <a:srgbClr val="1D1D1F"/>
+                </a:solidFill>
+                <a:latin typeface="Helvetica Neue"/>
+              </a:rPr>
+              <a:t>-  01 Repayment Status History: pay_max/sum/mean/std (lateness stats), n_late/n_late2plus (count late months), trend_pay, max_late_streak, recent_late, months_since_late, and ever_paid_full/never_used (read from the original, uncollapsed PAY codes).</a:t>
+            </a:r>
+          </a:p>
+          <a:p>
+            <a:pPr>
+              <a:lnSpc>
+                <a:spcPct val="108000"/>
+              </a:lnSpc>
+              <a:spcAft>
+                <a:spcPts val="1000"/>
+              </a:spcAft>
+            </a:pPr>
+            <a:r>
+              <a:rPr sz="1400">
+                <a:solidFill>
+                  <a:srgbClr val="1D1D1F"/>
+                </a:solidFill>
+                <a:latin typeface="Helvetica Neue"/>
+              </a:rPr>
+              <a:t>-  02 Credit Utilisation: util1-util6 (balance / limit each month), util_mean/max/trend, avail_credit (limit minus the most recent bill).</a:t>
+            </a:r>
+          </a:p>
+          <a:p>
+            <a:pPr>
+              <a:lnSpc>
+                <a:spcPct val="108000"/>
+              </a:lnSpc>
+              <a:spcAft>
+                <a:spcPts val="1000"/>
+              </a:spcAft>
+            </a:pPr>
+            <a:r>
+              <a:rPr sz="1400">
+                <a:solidFill>
+                  <a:srgbClr val="1D1D1F"/>
+                </a:solidFill>
+                <a:latin typeface="Helvetica Neue"/>
+              </a:rPr>
+              <a:t>-  03 Payment Coverage: payratio1-payratio5 (fraction of each bill actually paid), payratio_mean/min, paid_full_months, n_zero_pay.</a:t>
+            </a:r>
+          </a:p>
+          <a:p>
+            <a:pPr>
+              <a:lnSpc>
+                <a:spcPct val="108000"/>
+              </a:lnSpc>
+              <a:spcAft>
+                <a:spcPts val="1000"/>
+              </a:spcAft>
+            </a:pPr>
+            <a:r>
+              <a:rPr sz="1400">
+                <a:solidFill>
+                  <a:srgbClr val="1D1D1F"/>
+                </a:solidFill>
+                <a:latin typeface="Helvetica Neue"/>
+              </a:rPr>
+              <a:t>-  04 Levels &amp; Momentum: bill_sum/mean/std, amt_sum/mean/std, bill_growth, amt_over_limit, log_limit, restores the absolute scale the ratio families strip out, needed for the neural models (trees are scale-invariant and don't need it).</a:t>
+            </a:r>
+          </a:p>
+          <a:p>
+            <a:pPr>
+              <a:lnSpc>
+                <a:spcPct val="108000"/>
+              </a:lnSpc>
+              <a:spcAft>
+                <a:spcPts val="1000"/>
+              </a:spcAft>
+            </a:pPr>
+            <a:r>
+              <a:rPr sz="1400">
+                <a:solidFill>
+                  <a:srgbClr val="1D1D1F"/>
+                </a:solidFill>
+                <a:latin typeface="Helvetica Neue"/>
+              </a:rPr>
+              <a:t>-  05 Spending Decomposition (the largest gain of the project, +0.00046 OOF / +0.00173 hidden test): spend_t = BILL_t - BILL_(t+1) + PAY_AMT_t, plus spend1-5, spend_mean/max/std/trend, n_months_no_spend, spend_minus_paid, months_spend_gt_paid.</a:t>
+            </a:r>
+          </a:p>
+          <a:p>
+            <a:pPr>
+              <a:lnSpc>
+                <a:spcPct val="108000"/>
+              </a:lnSpc>
+              <a:spcAft>
+                <a:spcPts val="1000"/>
+              </a:spcAft>
+            </a:pPr>
+            <a:r>
+              <a:rPr sz="1400">
+                <a:solidFill>
+                  <a:srgbClr val="1D1D1F"/>
+                </a:solidFill>
+                <a:latin typeface="Helvetica Neue"/>
+              </a:rPr>
+              <a:t>-  06 Minimum-Payment Behaviour: min_pay_ratio_mean/min (distance from the assumed 10% minimum due), months_paid_about_min, months_paid_under_min.</a:t>
+            </a:r>
+          </a:p>
+          <a:p>
+            <a:pPr>
+              <a:lnSpc>
+                <a:spcPct val="108000"/>
+              </a:lnSpc>
+              <a:spcAft>
+                <a:spcPts val="1000"/>
+              </a:spcAft>
+            </a:pPr>
+            <a:r>
+              <a:rPr sz="1400">
+                <a:solidFill>
+                  <a:srgbClr val="1D1D1F"/>
+                </a:solidFill>
+                <a:latin typeface="Helvetica Neue"/>
+              </a:rPr>
+              <a:t>-  Six additional feature families were tried and rejected; see the main Feature Engineering slide for their measured deltas.</a:t>
+            </a:r>
+          </a:p>
+        </p:txBody>
+      </p:sp>
+    </p:spTree>
+  </p:cSld>
+  <p:clrMapOvr>
+    <a:masterClrMapping/>
+  </p:clrMapOvr>
+</p:sld>
+</file>
+
+<file path=ppt/slides/slide2.xml><?xml version="1.0" encoding="utf-8"?>
+<p:sld xmlns:a="http://schemas.openxmlformats.org/drawingml/2006/main" xmlns:p="http://schemas.openxmlformats.org/presentationml/2006/main" xmlns:r="http://schemas.openxmlformats.org/officeDocument/2006/relationships">
+  <p:cSld>
+    <p:spTree>
+      <p:nvGrpSpPr>
+        <p:cNvPr id="1" name=""/>
+        <p:cNvGrpSpPr/>
+        <p:nvPr/>
+      </p:nvGrpSpPr>
+      <p:grpSpPr/>
+      <p:sp>
+        <p:nvSpPr>
+          <p:cNvPr id="2" name="Rectangle 1"/>
           <p:cNvSpPr/>
           <p:nvPr/>
         </p:nvSpPr>
         <p:spPr>
           <a:xfrm>
-            <a:off x="640080" y="1600200"/>
-            <a:ext cx="5212080" cy="2148840"/>
-          </a:xfrm>
-          <a:prstGeom prst="roundRect">
-            <a:avLst>
-              <a:gd name="adj" fmla="val 4000"/>
-            </a:avLst>
+            <a:off x="0" y="0"/>
+            <a:ext cx="12191695" cy="6858000"/>
+          </a:xfrm>
+          <a:prstGeom prst="rect">
+            <a:avLst/>
           </a:prstGeom>
           <a:solidFill>
-            <a:srgbClr val="FFFFFF"/>
+            <a:srgbClr val="F5F5F7"/>
           </a:solidFill>
-          <a:ln w="12700">
-            <a:solidFill>
-              <a:srgbClr val="D2D2D7"/>
-            </a:solidFill>
+          <a:ln>
+            <a:noFill/>
           </a:ln>
           <a:effectLst/>
         </p:spPr>
@@ -6201,14 +6372,14 @@
       </p:sp>
       <p:sp>
         <p:nvSpPr>
-          <p:cNvPr id="6" name="TextBox 5"/>
-          <p:cNvSpPr txBox="1"/>
-          <p:nvPr/>
-        </p:nvSpPr>
-        <p:spPr>
-          <a:xfrm>
-            <a:off x="841248" y="1728216"/>
-            <a:ext cx="914400" cy="457200"/>
+          <p:cNvPr id="3" name="TextBox 2"/>
+          <p:cNvSpPr txBox="1"/>
+          <p:nvPr/>
+        </p:nvSpPr>
+        <p:spPr>
+          <a:xfrm>
+            <a:off x="640080" y="502920"/>
+            <a:ext cx="7315200" cy="365760"/>
           </a:xfrm>
           <a:prstGeom prst="rect">
             <a:avLst/>
@@ -6227,27 +6398,27 @@
               </a:lnSpc>
             </a:pPr>
             <a:r>
-              <a:rPr sz="3000" b="1" i="0">
-                <a:solidFill>
-                  <a:srgbClr val="D2D2D7"/>
-                </a:solidFill>
-                <a:latin typeface="Helvetica Neue"/>
-              </a:rPr>
-              <a:t>01</a:t>
-            </a:r>
-          </a:p>
-        </p:txBody>
-      </p:sp>
-      <p:sp>
-        <p:nvSpPr>
-          <p:cNvPr id="7" name="TextBox 6"/>
-          <p:cNvSpPr txBox="1"/>
-          <p:nvPr/>
-        </p:nvSpPr>
-        <p:spPr>
-          <a:xfrm>
-            <a:off x="841248" y="2167128"/>
-            <a:ext cx="4809744" cy="365760"/>
+              <a:rPr sz="1300" b="1" i="0">
+                <a:solidFill>
+                  <a:srgbClr val="0071E3"/>
+                </a:solidFill>
+                <a:latin typeface="Helvetica Neue"/>
+              </a:rPr>
+              <a:t>PREPARATION</a:t>
+            </a:r>
+          </a:p>
+        </p:txBody>
+      </p:sp>
+      <p:sp>
+        <p:nvSpPr>
+          <p:cNvPr id="4" name="TextBox 3"/>
+          <p:cNvSpPr txBox="1"/>
+          <p:nvPr/>
+        </p:nvSpPr>
+        <p:spPr>
+          <a:xfrm>
+            <a:off x="640080" y="822960"/>
+            <a:ext cx="10881360" cy="914400"/>
           </a:xfrm>
           <a:prstGeom prst="rect">
             <a:avLst/>
@@ -6266,144 +6437,26 @@
               </a:lnSpc>
             </a:pPr>
             <a:r>
-              <a:rPr sz="1700" b="1" i="0">
+              <a:rPr sz="3400" b="1" i="0">
                 <a:solidFill>
                   <a:srgbClr val="1D1D1F"/>
                 </a:solidFill>
                 <a:latin typeface="Helvetica Neue"/>
               </a:rPr>
-              <a:t>Repayment Status</a:t>
-            </a:r>
-          </a:p>
-        </p:txBody>
-      </p:sp>
-      <p:sp>
-        <p:nvSpPr>
-          <p:cNvPr id="8" name="TextBox 7"/>
-          <p:cNvSpPr txBox="1"/>
-          <p:nvPr/>
-        </p:nvSpPr>
-        <p:spPr>
-          <a:xfrm>
-            <a:off x="841248" y="2560320"/>
-            <a:ext cx="4809744" cy="1051560"/>
-          </a:xfrm>
-          <a:prstGeom prst="rect">
-            <a:avLst/>
-          </a:prstGeom>
-          <a:noFill/>
-        </p:spPr>
-        <p:txBody>
-          <a:bodyPr wrap="square" lIns="0" rIns="0" tIns="0" bIns="0">
-            <a:spAutoFit/>
-          </a:bodyPr>
-          <a:lstStyle/>
-          <a:p>
-            <a:pPr>
-              <a:lnSpc>
-                <a:spcPct val="108000"/>
-              </a:lnSpc>
-              <a:spcAft>
-                <a:spcPts val="700"/>
-              </a:spcAft>
-            </a:pPr>
-            <a:r>
-              <a:rPr sz="1150">
-                <a:solidFill>
-                  <a:srgbClr val="1D1D1F"/>
-                </a:solidFill>
-                <a:latin typeface="Helvetica Neue"/>
-              </a:rPr>
-              <a:t>-  PAY_0, PAY_2 through PAY_6 show months behind on payment.</a:t>
-            </a:r>
-          </a:p>
-          <a:p>
-            <a:pPr>
-              <a:lnSpc>
-                <a:spcPct val="108000"/>
-              </a:lnSpc>
-              <a:spcAft>
-                <a:spcPts val="700"/>
-              </a:spcAft>
-            </a:pPr>
-            <a:r>
-              <a:rPr sz="1150">
-                <a:solidFill>
-                  <a:srgbClr val="1D1D1F"/>
-                </a:solidFill>
-                <a:latin typeface="Helvetica Neue"/>
-              </a:rPr>
-              <a:t>-  -2 = no balance, -1 = paid in full, 0 = paid minimum amount.</a:t>
-            </a:r>
-          </a:p>
-          <a:p>
-            <a:pPr>
-              <a:lnSpc>
-                <a:spcPct val="108000"/>
-              </a:lnSpc>
-              <a:spcAft>
-                <a:spcPts val="700"/>
-              </a:spcAft>
-            </a:pPr>
-            <a:r>
-              <a:rPr sz="1150">
-                <a:solidFill>
-                  <a:srgbClr val="1D1D1F"/>
-                </a:solidFill>
-                <a:latin typeface="Helvetica Neue"/>
-              </a:rPr>
-              <a:t>-  Raw values stay untouched in the cleaned dataset, no grouping here.</a:t>
-            </a:r>
-          </a:p>
-          <a:p>
-            <a:pPr>
-              <a:lnSpc>
-                <a:spcPct val="108000"/>
-              </a:lnSpc>
-              <a:spcAft>
-                <a:spcPts val="700"/>
-              </a:spcAft>
-            </a:pPr>
-            <a:r>
-              <a:rPr sz="1150">
-                <a:solidFill>
-                  <a:srgbClr val="1D1D1F"/>
-                </a:solidFill>
-                <a:latin typeface="Helvetica Neue"/>
-              </a:rPr>
-              <a:t>-  Aggregate lateness features (pay_max, n_late, trend_pay) clip -2/-1/0 to 0 only.</a:t>
-            </a:r>
-          </a:p>
-          <a:p>
-            <a:pPr>
-              <a:lnSpc>
-                <a:spcPct val="108000"/>
-              </a:lnSpc>
-              <a:spcAft>
-                <a:spcPts val="700"/>
-              </a:spcAft>
-            </a:pPr>
-            <a:r>
-              <a:rPr sz="1150">
-                <a:solidFill>
-                  <a:srgbClr val="1D1D1F"/>
-                </a:solidFill>
-                <a:latin typeface="Helvetica Neue"/>
-              </a:rPr>
-              <a:t>-  ever_paid_full and never_used deliberately keep the original codes.</a:t>
-            </a:r>
-          </a:p>
-        </p:txBody>
-      </p:sp>
-      <p:sp>
-        <p:nvSpPr>
-          <p:cNvPr id="9" name="Rounded Rectangle 8"/>
+              <a:t>Data Cleaning</a:t>
+            </a:r>
+          </a:p>
+        </p:txBody>
+      </p:sp>
+      <p:sp>
+        <p:nvSpPr>
+          <p:cNvPr id="5" name="Rounded Rectangle 4"/>
           <p:cNvSpPr/>
           <p:nvPr/>
         </p:nvSpPr>
         <p:spPr>
           <a:xfrm>
-            <a:off x="6126480" y="1600200"/>
+            <a:off x="640080" y="1600200"/>
             <a:ext cx="5212080" cy="2148840"/>
           </a:xfrm>
           <a:prstGeom prst="roundRect">
@@ -6445,13 +6498,13 @@
       </p:sp>
       <p:sp>
         <p:nvSpPr>
-          <p:cNvPr id="10" name="TextBox 9"/>
-          <p:cNvSpPr txBox="1"/>
-          <p:nvPr/>
-        </p:nvSpPr>
-        <p:spPr>
-          <a:xfrm>
-            <a:off x="6327648" y="1728216"/>
+          <p:cNvPr id="6" name="TextBox 5"/>
+          <p:cNvSpPr txBox="1"/>
+          <p:nvPr/>
+        </p:nvSpPr>
+        <p:spPr>
+          <a:xfrm>
+            <a:off x="841248" y="1728216"/>
             <a:ext cx="914400" cy="457200"/>
           </a:xfrm>
           <a:prstGeom prst="rect">
@@ -6477,20 +6530,20 @@
                 </a:solidFill>
                 <a:latin typeface="Helvetica Neue"/>
               </a:rPr>
-              <a:t>02</a:t>
-            </a:r>
-          </a:p>
-        </p:txBody>
-      </p:sp>
-      <p:sp>
-        <p:nvSpPr>
-          <p:cNvPr id="11" name="TextBox 10"/>
-          <p:cNvSpPr txBox="1"/>
-          <p:nvPr/>
-        </p:nvSpPr>
-        <p:spPr>
-          <a:xfrm>
-            <a:off x="6327648" y="2167128"/>
+              <a:t>01</a:t>
+            </a:r>
+          </a:p>
+        </p:txBody>
+      </p:sp>
+      <p:sp>
+        <p:nvSpPr>
+          <p:cNvPr id="7" name="TextBox 6"/>
+          <p:cNvSpPr txBox="1"/>
+          <p:nvPr/>
+        </p:nvSpPr>
+        <p:spPr>
+          <a:xfrm>
+            <a:off x="841248" y="2167128"/>
             <a:ext cx="4809744" cy="365760"/>
           </a:xfrm>
           <a:prstGeom prst="rect">
@@ -6512,24 +6565,24 @@
             <a:r>
               <a:rPr sz="1700" b="1" i="0">
                 <a:solidFill>
-                  <a:srgbClr val="CB382D"/>
-                </a:solidFill>
-                <a:latin typeface="Helvetica Neue"/>
-              </a:rPr>
-              <a:t>Education</a:t>
-            </a:r>
-          </a:p>
-        </p:txBody>
-      </p:sp>
-      <p:sp>
-        <p:nvSpPr>
-          <p:cNvPr id="12" name="TextBox 11"/>
-          <p:cNvSpPr txBox="1"/>
-          <p:nvPr/>
-        </p:nvSpPr>
-        <p:spPr>
-          <a:xfrm>
-            <a:off x="6327648" y="2560320"/>
+                  <a:srgbClr val="1D1D1F"/>
+                </a:solidFill>
+                <a:latin typeface="Helvetica Neue"/>
+              </a:rPr>
+              <a:t>Repayment Status</a:t>
+            </a:r>
+          </a:p>
+        </p:txBody>
+      </p:sp>
+      <p:sp>
+        <p:nvSpPr>
+          <p:cNvPr id="8" name="TextBox 7"/>
+          <p:cNvSpPr txBox="1"/>
+          <p:nvPr/>
+        </p:nvSpPr>
+        <p:spPr>
+          <a:xfrm>
+            <a:off x="841248" y="2560320"/>
             <a:ext cx="4809744" cy="1051560"/>
           </a:xfrm>
           <a:prstGeom prst="rect">
@@ -6558,7 +6611,7 @@
                 </a:solidFill>
                 <a:latin typeface="Helvetica Neue"/>
               </a:rPr>
-              <a:t>-  1 = graduate school, 2 = university, 3 = high school, 4 = other (official codes).</a:t>
+              <a:t>-  PAY_0, PAY_2 through PAY_6 show months behind on payment.</a:t>
             </a:r>
           </a:p>
           <a:p>
@@ -6577,7 +6630,7 @@
                 </a:solidFill>
                 <a:latin typeface="Helvetica Neue"/>
               </a:rPr>
-              <a:t>-  Undocumented codes 0, 5, 6 folded into "other" (4), 290 rows.</a:t>
+              <a:t>-  -2 = no balance, -1 = paid in full, 0 = paid minimum amount.</a:t>
             </a:r>
           </a:p>
           <a:p>
@@ -6596,7 +6649,7 @@
                 </a:solidFill>
                 <a:latin typeface="Helvetica Neue"/>
               </a:rPr>
-              <a:t>-  Confirmed cost: "other" over-predicted about 61%, AUC 0.645 vs about 0.79 elsewhere.</a:t>
+              <a:t>-  Raw values stay untouched in the cleaned dataset, no grouping here.</a:t>
             </a:r>
           </a:p>
           <a:p>
@@ -6615,20 +6668,39 @@
                 </a:solidFill>
                 <a:latin typeface="Helvetica Neue"/>
               </a:rPr>
-              <a:t>-  The only subgroup where the model underperforms its own base rate.</a:t>
-            </a:r>
-          </a:p>
-        </p:txBody>
-      </p:sp>
-      <p:sp>
-        <p:nvSpPr>
-          <p:cNvPr id="13" name="Rounded Rectangle 12"/>
+              <a:t>-  Aggregate lateness features (pay_max, n_late, trend_pay) clip -2/-1/0 to 0 only.</a:t>
+            </a:r>
+          </a:p>
+          <a:p>
+            <a:pPr>
+              <a:lnSpc>
+                <a:spcPct val="108000"/>
+              </a:lnSpc>
+              <a:spcAft>
+                <a:spcPts val="700"/>
+              </a:spcAft>
+            </a:pPr>
+            <a:r>
+              <a:rPr sz="1150">
+                <a:solidFill>
+                  <a:srgbClr val="1D1D1F"/>
+                </a:solidFill>
+                <a:latin typeface="Helvetica Neue"/>
+              </a:rPr>
+              <a:t>-  ever_paid_full and never_used deliberately keep the original codes.</a:t>
+            </a:r>
+          </a:p>
+        </p:txBody>
+      </p:sp>
+      <p:sp>
+        <p:nvSpPr>
+          <p:cNvPr id="9" name="Rounded Rectangle 8"/>
           <p:cNvSpPr/>
           <p:nvPr/>
         </p:nvSpPr>
         <p:spPr>
           <a:xfrm>
-            <a:off x="640080" y="3977640"/>
+            <a:off x="6126480" y="1600200"/>
             <a:ext cx="5212080" cy="2148840"/>
           </a:xfrm>
           <a:prstGeom prst="roundRect">
@@ -6670,13 +6742,13 @@
       </p:sp>
       <p:sp>
         <p:nvSpPr>
-          <p:cNvPr id="14" name="TextBox 13"/>
-          <p:cNvSpPr txBox="1"/>
-          <p:nvPr/>
-        </p:nvSpPr>
-        <p:spPr>
-          <a:xfrm>
-            <a:off x="841248" y="4105656"/>
+          <p:cNvPr id="10" name="TextBox 9"/>
+          <p:cNvSpPr txBox="1"/>
+          <p:nvPr/>
+        </p:nvSpPr>
+        <p:spPr>
+          <a:xfrm>
+            <a:off x="6327648" y="1728216"/>
             <a:ext cx="914400" cy="457200"/>
           </a:xfrm>
           <a:prstGeom prst="rect">
@@ -6702,20 +6774,20 @@
                 </a:solidFill>
                 <a:latin typeface="Helvetica Neue"/>
               </a:rPr>
-              <a:t>03</a:t>
-            </a:r>
-          </a:p>
-        </p:txBody>
-      </p:sp>
-      <p:sp>
-        <p:nvSpPr>
-          <p:cNvPr id="15" name="TextBox 14"/>
-          <p:cNvSpPr txBox="1"/>
-          <p:nvPr/>
-        </p:nvSpPr>
-        <p:spPr>
-          <a:xfrm>
-            <a:off x="841248" y="4544568"/>
+              <a:t>02</a:t>
+            </a:r>
+          </a:p>
+        </p:txBody>
+      </p:sp>
+      <p:sp>
+        <p:nvSpPr>
+          <p:cNvPr id="11" name="TextBox 10"/>
+          <p:cNvSpPr txBox="1"/>
+          <p:nvPr/>
+        </p:nvSpPr>
+        <p:spPr>
+          <a:xfrm>
+            <a:off x="6327648" y="2167128"/>
             <a:ext cx="4809744" cy="365760"/>
           </a:xfrm>
           <a:prstGeom prst="rect">
@@ -6737,24 +6809,24 @@
             <a:r>
               <a:rPr sz="1700" b="1" i="0">
                 <a:solidFill>
-                  <a:srgbClr val="1D1D1F"/>
-                </a:solidFill>
-                <a:latin typeface="Helvetica Neue"/>
-              </a:rPr>
-              <a:t>Marriage</a:t>
-            </a:r>
-          </a:p>
-        </p:txBody>
-      </p:sp>
-      <p:sp>
-        <p:nvSpPr>
-          <p:cNvPr id="16" name="TextBox 15"/>
-          <p:cNvSpPr txBox="1"/>
-          <p:nvPr/>
-        </p:nvSpPr>
-        <p:spPr>
-          <a:xfrm>
-            <a:off x="841248" y="4937760"/>
+                  <a:srgbClr val="CB382D"/>
+                </a:solidFill>
+                <a:latin typeface="Helvetica Neue"/>
+              </a:rPr>
+              <a:t>Education</a:t>
+            </a:r>
+          </a:p>
+        </p:txBody>
+      </p:sp>
+      <p:sp>
+        <p:nvSpPr>
+          <p:cNvPr id="12" name="TextBox 11"/>
+          <p:cNvSpPr txBox="1"/>
+          <p:nvPr/>
+        </p:nvSpPr>
+        <p:spPr>
+          <a:xfrm>
+            <a:off x="6327648" y="2560320"/>
             <a:ext cx="4809744" cy="1051560"/>
           </a:xfrm>
           <a:prstGeom prst="rect">
@@ -6783,7 +6855,7 @@
                 </a:solidFill>
                 <a:latin typeface="Helvetica Neue"/>
               </a:rPr>
-              <a:t>-  1 = married, 2 = single, 3 = other (official codes).</a:t>
+              <a:t>-  1 = graduate school, 2 = university, 3 = high school, 4 = other (official codes).</a:t>
             </a:r>
           </a:p>
           <a:p>
@@ -6802,7 +6874,7 @@
                 </a:solidFill>
                 <a:latin typeface="Helvetica Neue"/>
               </a:rPr>
-              <a:t>-  Undocumented code 0 folded into "other" (3), 42 rows.</a:t>
+              <a:t>-  Undocumented codes 0, 5, 6 folded into "other" (4), 290 rows.</a:t>
             </a:r>
           </a:p>
           <a:p>
@@ -6821,20 +6893,39 @@
                 </a:solidFill>
                 <a:latin typeface="Helvetica Neue"/>
               </a:rPr>
-              <a:t>-  No confirmed fairness or accuracy issue for this group.</a:t>
-            </a:r>
-          </a:p>
-        </p:txBody>
-      </p:sp>
-      <p:sp>
-        <p:nvSpPr>
-          <p:cNvPr id="17" name="Rounded Rectangle 16"/>
+              <a:t>-  Confirmed cost: "other" over-predicted about 61%, AUC 0.645 vs about 0.79 elsewhere.</a:t>
+            </a:r>
+          </a:p>
+          <a:p>
+            <a:pPr>
+              <a:lnSpc>
+                <a:spcPct val="108000"/>
+              </a:lnSpc>
+              <a:spcAft>
+                <a:spcPts val="700"/>
+              </a:spcAft>
+            </a:pPr>
+            <a:r>
+              <a:rPr sz="1150">
+                <a:solidFill>
+                  <a:srgbClr val="1D1D1F"/>
+                </a:solidFill>
+                <a:latin typeface="Helvetica Neue"/>
+              </a:rPr>
+              <a:t>-  The only subgroup where the model underperforms its own base rate.</a:t>
+            </a:r>
+          </a:p>
+        </p:txBody>
+      </p:sp>
+      <p:sp>
+        <p:nvSpPr>
+          <p:cNvPr id="13" name="Rounded Rectangle 12"/>
           <p:cNvSpPr/>
           <p:nvPr/>
         </p:nvSpPr>
         <p:spPr>
           <a:xfrm>
-            <a:off x="6126480" y="3977640"/>
+            <a:off x="640080" y="3977640"/>
             <a:ext cx="5212080" cy="2148840"/>
           </a:xfrm>
           <a:prstGeom prst="roundRect">
@@ -6876,13 +6967,13 @@
       </p:sp>
       <p:sp>
         <p:nvSpPr>
-          <p:cNvPr id="18" name="TextBox 17"/>
-          <p:cNvSpPr txBox="1"/>
-          <p:nvPr/>
-        </p:nvSpPr>
-        <p:spPr>
-          <a:xfrm>
-            <a:off x="6327648" y="4105656"/>
+          <p:cNvPr id="14" name="TextBox 13"/>
+          <p:cNvSpPr txBox="1"/>
+          <p:nvPr/>
+        </p:nvSpPr>
+        <p:spPr>
+          <a:xfrm>
+            <a:off x="841248" y="4105656"/>
             <a:ext cx="914400" cy="457200"/>
           </a:xfrm>
           <a:prstGeom prst="rect">
@@ -6908,20 +6999,20 @@
                 </a:solidFill>
                 <a:latin typeface="Helvetica Neue"/>
               </a:rPr>
-              <a:t>04</a:t>
-            </a:r>
-          </a:p>
-        </p:txBody>
-      </p:sp>
-      <p:sp>
-        <p:nvSpPr>
-          <p:cNvPr id="19" name="TextBox 18"/>
-          <p:cNvSpPr txBox="1"/>
-          <p:nvPr/>
-        </p:nvSpPr>
-        <p:spPr>
-          <a:xfrm>
-            <a:off x="6327648" y="4544568"/>
+              <a:t>03</a:t>
+            </a:r>
+          </a:p>
+        </p:txBody>
+      </p:sp>
+      <p:sp>
+        <p:nvSpPr>
+          <p:cNvPr id="15" name="TextBox 14"/>
+          <p:cNvSpPr txBox="1"/>
+          <p:nvPr/>
+        </p:nvSpPr>
+        <p:spPr>
+          <a:xfrm>
+            <a:off x="841248" y="4544568"/>
             <a:ext cx="4809744" cy="365760"/>
           </a:xfrm>
           <a:prstGeom prst="rect">
@@ -6947,20 +7038,20 @@
                 </a:solidFill>
                 <a:latin typeface="Helvetica Neue"/>
               </a:rPr>
-              <a:t>What We Didn't Clean</a:t>
-            </a:r>
-          </a:p>
-        </p:txBody>
-      </p:sp>
-      <p:sp>
-        <p:nvSpPr>
-          <p:cNvPr id="20" name="TextBox 19"/>
-          <p:cNvSpPr txBox="1"/>
-          <p:nvPr/>
-        </p:nvSpPr>
-        <p:spPr>
-          <a:xfrm>
-            <a:off x="6327648" y="4937760"/>
+              <a:t>Marriage</a:t>
+            </a:r>
+          </a:p>
+        </p:txBody>
+      </p:sp>
+      <p:sp>
+        <p:nvSpPr>
+          <p:cNvPr id="16" name="TextBox 15"/>
+          <p:cNvSpPr txBox="1"/>
+          <p:nvPr/>
+        </p:nvSpPr>
+        <p:spPr>
+          <a:xfrm>
+            <a:off x="841248" y="4937760"/>
             <a:ext cx="4809744" cy="1051560"/>
           </a:xfrm>
           <a:prstGeom prst="rect">
@@ -6989,7 +7080,7 @@
                 </a:solidFill>
                 <a:latin typeface="Helvetica Neue"/>
               </a:rPr>
-              <a:t>-  Zero missing values, no malformed rows, confirmed directly across all 24,000 rows.</a:t>
+              <a:t>-  1 = married, 2 = single, 3 = other (official codes).</a:t>
             </a:r>
           </a:p>
           <a:p>
@@ -7008,7 +7099,7 @@
                 </a:solidFill>
                 <a:latin typeface="Helvetica Neue"/>
               </a:rPr>
-              <a:t>-  No outlier removal: large balances and payments can be genuine risk signal.</a:t>
+              <a:t>-  Undocumented code 0 folded into "other" (3), 42 rows.</a:t>
             </a:r>
           </a:p>
           <a:p>
@@ -7027,9 +7118,158 @@
                 </a:solidFill>
                 <a:latin typeface="Helvetica Neue"/>
               </a:rPr>
-              <a:t>-  No resampling or class weighting: preserves the true 22.12% base rate for calibration.</a:t>
-            </a:r>
-          </a:p>
+              <a:t>-  No confirmed fairness or accuracy issue for this group.</a:t>
+            </a:r>
+          </a:p>
+        </p:txBody>
+      </p:sp>
+      <p:sp>
+        <p:nvSpPr>
+          <p:cNvPr id="17" name="Rounded Rectangle 16"/>
+          <p:cNvSpPr/>
+          <p:nvPr/>
+        </p:nvSpPr>
+        <p:spPr>
+          <a:xfrm>
+            <a:off x="6126480" y="3977640"/>
+            <a:ext cx="5212080" cy="2148840"/>
+          </a:xfrm>
+          <a:prstGeom prst="roundRect">
+            <a:avLst>
+              <a:gd name="adj" fmla="val 4000"/>
+            </a:avLst>
+          </a:prstGeom>
+          <a:solidFill>
+            <a:srgbClr val="FFFFFF"/>
+          </a:solidFill>
+          <a:ln w="12700">
+            <a:solidFill>
+              <a:srgbClr val="D2D2D7"/>
+            </a:solidFill>
+          </a:ln>
+          <a:effectLst/>
+        </p:spPr>
+        <p:style>
+          <a:lnRef idx="1">
+            <a:schemeClr val="accent1"/>
+          </a:lnRef>
+          <a:fillRef idx="3">
+            <a:schemeClr val="accent1"/>
+          </a:fillRef>
+          <a:effectRef idx="2">
+            <a:schemeClr val="accent1"/>
+          </a:effectRef>
+          <a:fontRef idx="minor">
+            <a:schemeClr val="lt1"/>
+          </a:fontRef>
+        </p:style>
+        <p:txBody>
+          <a:bodyPr rtlCol="0" anchor="ctr"/>
+          <a:lstStyle/>
+          <a:p>
+            <a:pPr algn="ctr"/>
+          </a:p>
+        </p:txBody>
+      </p:sp>
+      <p:sp>
+        <p:nvSpPr>
+          <p:cNvPr id="18" name="TextBox 17"/>
+          <p:cNvSpPr txBox="1"/>
+          <p:nvPr/>
+        </p:nvSpPr>
+        <p:spPr>
+          <a:xfrm>
+            <a:off x="6327648" y="4105656"/>
+            <a:ext cx="914400" cy="457200"/>
+          </a:xfrm>
+          <a:prstGeom prst="rect">
+            <a:avLst/>
+          </a:prstGeom>
+          <a:noFill/>
+        </p:spPr>
+        <p:txBody>
+          <a:bodyPr wrap="square" anchor="t" lIns="0" rIns="0" tIns="0" bIns="0">
+            <a:spAutoFit/>
+          </a:bodyPr>
+          <a:lstStyle/>
+          <a:p>
+            <a:pPr algn="l">
+              <a:lnSpc>
+                <a:spcPct val="100000"/>
+              </a:lnSpc>
+            </a:pPr>
+            <a:r>
+              <a:rPr sz="3000" b="1" i="0">
+                <a:solidFill>
+                  <a:srgbClr val="D2D2D7"/>
+                </a:solidFill>
+                <a:latin typeface="Helvetica Neue"/>
+              </a:rPr>
+              <a:t>04</a:t>
+            </a:r>
+          </a:p>
+        </p:txBody>
+      </p:sp>
+      <p:sp>
+        <p:nvSpPr>
+          <p:cNvPr id="19" name="TextBox 18"/>
+          <p:cNvSpPr txBox="1"/>
+          <p:nvPr/>
+        </p:nvSpPr>
+        <p:spPr>
+          <a:xfrm>
+            <a:off x="6327648" y="4544568"/>
+            <a:ext cx="4809744" cy="365760"/>
+          </a:xfrm>
+          <a:prstGeom prst="rect">
+            <a:avLst/>
+          </a:prstGeom>
+          <a:noFill/>
+        </p:spPr>
+        <p:txBody>
+          <a:bodyPr wrap="square" anchor="t" lIns="0" rIns="0" tIns="0" bIns="0">
+            <a:spAutoFit/>
+          </a:bodyPr>
+          <a:lstStyle/>
+          <a:p>
+            <a:pPr algn="l">
+              <a:lnSpc>
+                <a:spcPct val="100000"/>
+              </a:lnSpc>
+            </a:pPr>
+            <a:r>
+              <a:rPr sz="1700" b="1" i="0">
+                <a:solidFill>
+                  <a:srgbClr val="1D1D1F"/>
+                </a:solidFill>
+                <a:latin typeface="Helvetica Neue"/>
+              </a:rPr>
+              <a:t>What We Didn't Clean</a:t>
+            </a:r>
+          </a:p>
+        </p:txBody>
+      </p:sp>
+      <p:sp>
+        <p:nvSpPr>
+          <p:cNvPr id="20" name="TextBox 19"/>
+          <p:cNvSpPr txBox="1"/>
+          <p:nvPr/>
+        </p:nvSpPr>
+        <p:spPr>
+          <a:xfrm>
+            <a:off x="6327648" y="4937760"/>
+            <a:ext cx="4809744" cy="1051560"/>
+          </a:xfrm>
+          <a:prstGeom prst="rect">
+            <a:avLst/>
+          </a:prstGeom>
+          <a:noFill/>
+        </p:spPr>
+        <p:txBody>
+          <a:bodyPr wrap="square" lIns="0" rIns="0" tIns="0" bIns="0">
+            <a:spAutoFit/>
+          </a:bodyPr>
+          <a:lstStyle/>
           <a:p>
             <a:pPr>
               <a:lnSpc>
@@ -7046,7 +7286,64 @@
                 </a:solidFill>
                 <a:latin typeface="Helvetica Neue"/>
               </a:rPr>
-              <a:t>-  client_id dropped as a non-informative identifier.</a:t>
+              <a:t>-  Zero missing values, no malformed rows, confirmed directly across all 24,000 rows.</a:t>
+            </a:r>
+          </a:p>
+          <a:p>
+            <a:pPr>
+              <a:lnSpc>
+                <a:spcPct val="108000"/>
+              </a:lnSpc>
+              <a:spcAft>
+                <a:spcPts val="700"/>
+              </a:spcAft>
+            </a:pPr>
+            <a:r>
+              <a:rPr sz="1150">
+                <a:solidFill>
+                  <a:srgbClr val="1D1D1F"/>
+                </a:solidFill>
+                <a:latin typeface="Helvetica Neue"/>
+              </a:rPr>
+              <a:t>-  No outlier removal: large balances and payments can be genuine risk signal.</a:t>
+            </a:r>
+          </a:p>
+          <a:p>
+            <a:pPr>
+              <a:lnSpc>
+                <a:spcPct val="108000"/>
+              </a:lnSpc>
+              <a:spcAft>
+                <a:spcPts val="700"/>
+              </a:spcAft>
+            </a:pPr>
+            <a:r>
+              <a:rPr sz="1150">
+                <a:solidFill>
+                  <a:srgbClr val="1D1D1F"/>
+                </a:solidFill>
+                <a:latin typeface="Helvetica Neue"/>
+              </a:rPr>
+              <a:t>-  No resampling or class weighting: preserves the true 22.12% base rate for calibration.</a:t>
+            </a:r>
+          </a:p>
+          <a:p>
+            <a:pPr>
+              <a:lnSpc>
+                <a:spcPct val="108000"/>
+              </a:lnSpc>
+              <a:spcAft>
+                <a:spcPts val="700"/>
+              </a:spcAft>
+            </a:pPr>
+            <a:r>
+              <a:rPr sz="1150">
+                <a:solidFill>
+                  <a:srgbClr val="1D1D1F"/>
+                </a:solidFill>
+                <a:latin typeface="Helvetica Neue"/>
+              </a:rPr>
+              <a:t>-  client_id excluded from the feature matrix (not predictive), kept for the submission's ID column.</a:t>
             </a:r>
           </a:p>
         </p:txBody>

--- a/presentation/finalist-presentation.pptx
+++ b/presentation/finalist-presentation.pptx
@@ -7483,7 +7483,7 @@
                 </a:solidFill>
                 <a:latin typeface="Helvetica Neue"/>
               </a:rPr>
-              <a:t>THE LARGEST SINGLE GAIN</a:t>
+              <a:t>SIX FAMILIES, ONE STANDOUT</a:t>
             </a:r>
           </a:p>
         </p:txBody>
@@ -7516,7 +7516,7 @@
               </a:lnSpc>
             </a:pPr>
             <a:r>
-              <a:rPr sz="3400" b="1" i="0">
+              <a:rPr sz="3200" b="1" i="0">
                 <a:solidFill>
                   <a:srgbClr val="1D1D1F"/>
                 </a:solidFill>
@@ -7535,8 +7535,95 @@
         </p:nvSpPr>
         <p:spPr>
           <a:xfrm>
+            <a:off x="640080" y="1234440"/>
+            <a:ext cx="10881360" cy="320040"/>
+          </a:xfrm>
+          <a:prstGeom prst="rect">
+            <a:avLst/>
+          </a:prstGeom>
+          <a:noFill/>
+        </p:spPr>
+        <p:txBody>
+          <a:bodyPr wrap="square" anchor="t" lIns="0" rIns="0" tIns="0" bIns="0">
+            <a:spAutoFit/>
+          </a:bodyPr>
+          <a:lstStyle/>
+          <a:p>
+            <a:pPr algn="l">
+              <a:lnSpc>
+                <a:spcPct val="100000"/>
+              </a:lnSpc>
+            </a:pPr>
+            <a:r>
+              <a:rPr sz="1450" b="0" i="0">
+                <a:solidFill>
+                  <a:srgbClr val="6E6E73"/>
+                </a:solidFill>
+                <a:latin typeface="Helvetica Neue"/>
+              </a:rPr>
+              <a:t>23 raw columns became 81 features across six families.</a:t>
+            </a:r>
+          </a:p>
+        </p:txBody>
+      </p:sp>
+      <p:sp>
+        <p:nvSpPr>
+          <p:cNvPr id="6" name="Rounded Rectangle 5"/>
+          <p:cNvSpPr/>
+          <p:nvPr/>
+        </p:nvSpPr>
+        <p:spPr>
+          <a:xfrm>
             <a:off x="640080" y="1691640"/>
-            <a:ext cx="10881360" cy="502920"/>
+            <a:ext cx="3456432" cy="2331720"/>
+          </a:xfrm>
+          <a:prstGeom prst="roundRect">
+            <a:avLst>
+              <a:gd name="adj" fmla="val 5000"/>
+            </a:avLst>
+          </a:prstGeom>
+          <a:solidFill>
+            <a:srgbClr val="FFFFFF"/>
+          </a:solidFill>
+          <a:ln w="12700">
+            <a:solidFill>
+              <a:srgbClr val="D2D2D7"/>
+            </a:solidFill>
+          </a:ln>
+          <a:effectLst/>
+        </p:spPr>
+        <p:style>
+          <a:lnRef idx="1">
+            <a:schemeClr val="accent1"/>
+          </a:lnRef>
+          <a:fillRef idx="3">
+            <a:schemeClr val="accent1"/>
+          </a:fillRef>
+          <a:effectRef idx="2">
+            <a:schemeClr val="accent1"/>
+          </a:effectRef>
+          <a:fontRef idx="minor">
+            <a:schemeClr val="lt1"/>
+          </a:fontRef>
+        </p:style>
+        <p:txBody>
+          <a:bodyPr rtlCol="0" anchor="ctr"/>
+          <a:lstStyle/>
+          <a:p>
+            <a:pPr algn="ctr"/>
+          </a:p>
+        </p:txBody>
+      </p:sp>
+      <p:sp>
+        <p:nvSpPr>
+          <p:cNvPr id="7" name="TextBox 6"/>
+          <p:cNvSpPr txBox="1"/>
+          <p:nvPr/>
+        </p:nvSpPr>
+        <p:spPr>
+          <a:xfrm>
+            <a:off x="768096" y="1764792"/>
+            <a:ext cx="548640" cy="274320"/>
           </a:xfrm>
           <a:prstGeom prst="rect">
             <a:avLst/>
@@ -7555,162 +7642,1284 @@
               </a:lnSpc>
             </a:pPr>
             <a:r>
-              <a:rPr sz="1700" b="0" i="0">
+              <a:rPr sz="1600" b="1" i="0">
+                <a:solidFill>
+                  <a:srgbClr val="D2D2D7"/>
+                </a:solidFill>
+                <a:latin typeface="Helvetica Neue"/>
+              </a:rPr>
+              <a:t>01</a:t>
+            </a:r>
+          </a:p>
+        </p:txBody>
+      </p:sp>
+      <p:sp>
+        <p:nvSpPr>
+          <p:cNvPr id="8" name="TextBox 7"/>
+          <p:cNvSpPr txBox="1"/>
+          <p:nvPr/>
+        </p:nvSpPr>
+        <p:spPr>
+          <a:xfrm>
+            <a:off x="768096" y="2002536"/>
+            <a:ext cx="3200400" cy="256032"/>
+          </a:xfrm>
+          <a:prstGeom prst="rect">
+            <a:avLst/>
+          </a:prstGeom>
+          <a:noFill/>
+        </p:spPr>
+        <p:txBody>
+          <a:bodyPr wrap="square" anchor="t" lIns="0" rIns="0" tIns="0" bIns="0">
+            <a:spAutoFit/>
+          </a:bodyPr>
+          <a:lstStyle/>
+          <a:p>
+            <a:pPr algn="l">
+              <a:lnSpc>
+                <a:spcPct val="100000"/>
+              </a:lnSpc>
+            </a:pPr>
+            <a:r>
+              <a:rPr sz="1150" b="1" i="0">
+                <a:solidFill>
+                  <a:srgbClr val="1D1D1F"/>
+                </a:solidFill>
+                <a:latin typeface="Helvetica Neue"/>
+              </a:rPr>
+              <a:t>Repayment Status History</a:t>
+            </a:r>
+          </a:p>
+        </p:txBody>
+      </p:sp>
+      <p:sp>
+        <p:nvSpPr>
+          <p:cNvPr id="9" name="TextBox 8"/>
+          <p:cNvSpPr txBox="1"/>
+          <p:nvPr/>
+        </p:nvSpPr>
+        <p:spPr>
+          <a:xfrm>
+            <a:off x="768096" y="2276856"/>
+            <a:ext cx="3200400" cy="1691640"/>
+          </a:xfrm>
+          <a:prstGeom prst="rect">
+            <a:avLst/>
+          </a:prstGeom>
+          <a:noFill/>
+        </p:spPr>
+        <p:txBody>
+          <a:bodyPr wrap="square" lIns="0" rIns="0" tIns="0" bIns="0">
+            <a:spAutoFit/>
+          </a:bodyPr>
+          <a:lstStyle/>
+          <a:p>
+            <a:pPr>
+              <a:lnSpc>
+                <a:spcPct val="108000"/>
+              </a:lnSpc>
+              <a:spcAft>
+                <a:spcPts val="400"/>
+              </a:spcAft>
+            </a:pPr>
+            <a:r>
+              <a:rPr sz="800">
+                <a:solidFill>
+                  <a:srgbClr val="1D1D1F"/>
+                </a:solidFill>
+                <a:latin typeface="Helvetica Neue"/>
+              </a:rPr>
+              <a:t>-  Worst and average lateness across the 6 months (pay_max, pay_mean).</a:t>
+            </a:r>
+          </a:p>
+          <a:p>
+            <a:pPr>
+              <a:lnSpc>
+                <a:spcPct val="108000"/>
+              </a:lnSpc>
+              <a:spcAft>
+                <a:spcPts val="400"/>
+              </a:spcAft>
+            </a:pPr>
+            <a:r>
+              <a:rPr sz="800">
+                <a:solidFill>
+                  <a:srgbClr val="1D1D1F"/>
+                </a:solidFill>
+                <a:latin typeface="Helvetica Neue"/>
+              </a:rPr>
+              <a:t>-  Number of late months, and months 2+ behind (n_late, n_late2plus).</a:t>
+            </a:r>
+          </a:p>
+          <a:p>
+            <a:pPr>
+              <a:lnSpc>
+                <a:spcPct val="108000"/>
+              </a:lnSpc>
+              <a:spcAft>
+                <a:spcPts val="400"/>
+              </a:spcAft>
+            </a:pPr>
+            <a:r>
+              <a:rPr sz="800">
+                <a:solidFill>
+                  <a:srgbClr val="1D1D1F"/>
+                </a:solidFill>
+                <a:latin typeface="Helvetica Neue"/>
+              </a:rPr>
+              <a:t>-  Trend: improving or worsening, plus longest late streak (trend_pay, max_late_streak).</a:t>
+            </a:r>
+          </a:p>
+          <a:p>
+            <a:pPr>
+              <a:lnSpc>
+                <a:spcPct val="108000"/>
+              </a:lnSpc>
+              <a:spcAft>
+                <a:spcPts val="400"/>
+              </a:spcAft>
+            </a:pPr>
+            <a:r>
+              <a:rPr sz="800">
+                <a:solidFill>
+                  <a:srgbClr val="1D1D1F"/>
+                </a:solidFill>
+                <a:latin typeface="Helvetica Neue"/>
+              </a:rPr>
+              <a:t>-  How recently they were late, weighted to the last 2 months (recent_late, months_since_late).</a:t>
+            </a:r>
+          </a:p>
+          <a:p>
+            <a:pPr>
+              <a:lnSpc>
+                <a:spcPct val="108000"/>
+              </a:lnSpc>
+              <a:spcAft>
+                <a:spcPts val="400"/>
+              </a:spcAft>
+            </a:pPr>
+            <a:r>
+              <a:rPr sz="800">
+                <a:solidFill>
+                  <a:srgbClr val="1D1D1F"/>
+                </a:solidFill>
+                <a:latin typeface="Helvetica Neue"/>
+              </a:rPr>
+              <a:t>-  Ever paid in full, or never used the card (ever_paid_full, never_used).</a:t>
+            </a:r>
+          </a:p>
+        </p:txBody>
+      </p:sp>
+      <p:sp>
+        <p:nvSpPr>
+          <p:cNvPr id="10" name="Rounded Rectangle 9"/>
+          <p:cNvSpPr/>
+          <p:nvPr/>
+        </p:nvSpPr>
+        <p:spPr>
+          <a:xfrm>
+            <a:off x="4242816" y="1691640"/>
+            <a:ext cx="3456432" cy="2331720"/>
+          </a:xfrm>
+          <a:prstGeom prst="roundRect">
+            <a:avLst>
+              <a:gd name="adj" fmla="val 5000"/>
+            </a:avLst>
+          </a:prstGeom>
+          <a:solidFill>
+            <a:srgbClr val="FFFFFF"/>
+          </a:solidFill>
+          <a:ln w="12700">
+            <a:solidFill>
+              <a:srgbClr val="D2D2D7"/>
+            </a:solidFill>
+          </a:ln>
+          <a:effectLst/>
+        </p:spPr>
+        <p:style>
+          <a:lnRef idx="1">
+            <a:schemeClr val="accent1"/>
+          </a:lnRef>
+          <a:fillRef idx="3">
+            <a:schemeClr val="accent1"/>
+          </a:fillRef>
+          <a:effectRef idx="2">
+            <a:schemeClr val="accent1"/>
+          </a:effectRef>
+          <a:fontRef idx="minor">
+            <a:schemeClr val="lt1"/>
+          </a:fontRef>
+        </p:style>
+        <p:txBody>
+          <a:bodyPr rtlCol="0" anchor="ctr"/>
+          <a:lstStyle/>
+          <a:p>
+            <a:pPr algn="ctr"/>
+          </a:p>
+        </p:txBody>
+      </p:sp>
+      <p:sp>
+        <p:nvSpPr>
+          <p:cNvPr id="11" name="TextBox 10"/>
+          <p:cNvSpPr txBox="1"/>
+          <p:nvPr/>
+        </p:nvSpPr>
+        <p:spPr>
+          <a:xfrm>
+            <a:off x="4370832" y="1764792"/>
+            <a:ext cx="548640" cy="274320"/>
+          </a:xfrm>
+          <a:prstGeom prst="rect">
+            <a:avLst/>
+          </a:prstGeom>
+          <a:noFill/>
+        </p:spPr>
+        <p:txBody>
+          <a:bodyPr wrap="square" anchor="t" lIns="0" rIns="0" tIns="0" bIns="0">
+            <a:spAutoFit/>
+          </a:bodyPr>
+          <a:lstStyle/>
+          <a:p>
+            <a:pPr algn="l">
+              <a:lnSpc>
+                <a:spcPct val="100000"/>
+              </a:lnSpc>
+            </a:pPr>
+            <a:r>
+              <a:rPr sz="1600" b="1" i="0">
+                <a:solidFill>
+                  <a:srgbClr val="D2D2D7"/>
+                </a:solidFill>
+                <a:latin typeface="Helvetica Neue"/>
+              </a:rPr>
+              <a:t>02</a:t>
+            </a:r>
+          </a:p>
+        </p:txBody>
+      </p:sp>
+      <p:sp>
+        <p:nvSpPr>
+          <p:cNvPr id="12" name="TextBox 11"/>
+          <p:cNvSpPr txBox="1"/>
+          <p:nvPr/>
+        </p:nvSpPr>
+        <p:spPr>
+          <a:xfrm>
+            <a:off x="4370832" y="2002536"/>
+            <a:ext cx="3200400" cy="256032"/>
+          </a:xfrm>
+          <a:prstGeom prst="rect">
+            <a:avLst/>
+          </a:prstGeom>
+          <a:noFill/>
+        </p:spPr>
+        <p:txBody>
+          <a:bodyPr wrap="square" anchor="t" lIns="0" rIns="0" tIns="0" bIns="0">
+            <a:spAutoFit/>
+          </a:bodyPr>
+          <a:lstStyle/>
+          <a:p>
+            <a:pPr algn="l">
+              <a:lnSpc>
+                <a:spcPct val="100000"/>
+              </a:lnSpc>
+            </a:pPr>
+            <a:r>
+              <a:rPr sz="1150" b="1" i="0">
+                <a:solidFill>
+                  <a:srgbClr val="1D1D1F"/>
+                </a:solidFill>
+                <a:latin typeface="Helvetica Neue"/>
+              </a:rPr>
+              <a:t>Credit Utilisation</a:t>
+            </a:r>
+          </a:p>
+        </p:txBody>
+      </p:sp>
+      <p:sp>
+        <p:nvSpPr>
+          <p:cNvPr id="13" name="TextBox 12"/>
+          <p:cNvSpPr txBox="1"/>
+          <p:nvPr/>
+        </p:nvSpPr>
+        <p:spPr>
+          <a:xfrm>
+            <a:off x="4370832" y="2276856"/>
+            <a:ext cx="3200400" cy="1691640"/>
+          </a:xfrm>
+          <a:prstGeom prst="rect">
+            <a:avLst/>
+          </a:prstGeom>
+          <a:noFill/>
+        </p:spPr>
+        <p:txBody>
+          <a:bodyPr wrap="square" lIns="0" rIns="0" tIns="0" bIns="0">
+            <a:spAutoFit/>
+          </a:bodyPr>
+          <a:lstStyle/>
+          <a:p>
+            <a:pPr>
+              <a:lnSpc>
+                <a:spcPct val="108000"/>
+              </a:lnSpc>
+              <a:spcAft>
+                <a:spcPts val="400"/>
+              </a:spcAft>
+            </a:pPr>
+            <a:r>
+              <a:rPr sz="800">
+                <a:solidFill>
+                  <a:srgbClr val="1D1D1F"/>
+                </a:solidFill>
+                <a:latin typeface="Helvetica Neue"/>
+              </a:rPr>
+              <a:t>-  Share of the credit limit used up, each of the 6 months (util1-util6).</a:t>
+            </a:r>
+          </a:p>
+          <a:p>
+            <a:pPr>
+              <a:lnSpc>
+                <a:spcPct val="108000"/>
+              </a:lnSpc>
+              <a:spcAft>
+                <a:spcPts val="400"/>
+              </a:spcAft>
+            </a:pPr>
+            <a:r>
+              <a:rPr sz="800">
+                <a:solidFill>
+                  <a:srgbClr val="1D1D1F"/>
+                </a:solidFill>
+                <a:latin typeface="Helvetica Neue"/>
+              </a:rPr>
+              <a:t>-  Average and peak usage, rising or falling (util_mean, util_max, util_trend).</a:t>
+            </a:r>
+          </a:p>
+          <a:p>
+            <a:pPr>
+              <a:lnSpc>
+                <a:spcPct val="108000"/>
+              </a:lnSpc>
+              <a:spcAft>
+                <a:spcPts val="400"/>
+              </a:spcAft>
+            </a:pPr>
+            <a:r>
+              <a:rPr sz="800">
+                <a:solidFill>
+                  <a:srgbClr val="1D1D1F"/>
+                </a:solidFill>
+                <a:latin typeface="Helvetica Neue"/>
+              </a:rPr>
+              <a:t>-  Actual dollars of credit still available (avail_credit).</a:t>
+            </a:r>
+          </a:p>
+        </p:txBody>
+      </p:sp>
+      <p:sp>
+        <p:nvSpPr>
+          <p:cNvPr id="14" name="Rounded Rectangle 13"/>
+          <p:cNvSpPr/>
+          <p:nvPr/>
+        </p:nvSpPr>
+        <p:spPr>
+          <a:xfrm>
+            <a:off x="7845552" y="1691640"/>
+            <a:ext cx="3456432" cy="2331720"/>
+          </a:xfrm>
+          <a:prstGeom prst="roundRect">
+            <a:avLst>
+              <a:gd name="adj" fmla="val 5000"/>
+            </a:avLst>
+          </a:prstGeom>
+          <a:solidFill>
+            <a:srgbClr val="FFFFFF"/>
+          </a:solidFill>
+          <a:ln w="12700">
+            <a:solidFill>
+              <a:srgbClr val="D2D2D7"/>
+            </a:solidFill>
+          </a:ln>
+          <a:effectLst/>
+        </p:spPr>
+        <p:style>
+          <a:lnRef idx="1">
+            <a:schemeClr val="accent1"/>
+          </a:lnRef>
+          <a:fillRef idx="3">
+            <a:schemeClr val="accent1"/>
+          </a:fillRef>
+          <a:effectRef idx="2">
+            <a:schemeClr val="accent1"/>
+          </a:effectRef>
+          <a:fontRef idx="minor">
+            <a:schemeClr val="lt1"/>
+          </a:fontRef>
+        </p:style>
+        <p:txBody>
+          <a:bodyPr rtlCol="0" anchor="ctr"/>
+          <a:lstStyle/>
+          <a:p>
+            <a:pPr algn="ctr"/>
+          </a:p>
+        </p:txBody>
+      </p:sp>
+      <p:sp>
+        <p:nvSpPr>
+          <p:cNvPr id="15" name="TextBox 14"/>
+          <p:cNvSpPr txBox="1"/>
+          <p:nvPr/>
+        </p:nvSpPr>
+        <p:spPr>
+          <a:xfrm>
+            <a:off x="7973568" y="1764792"/>
+            <a:ext cx="548640" cy="274320"/>
+          </a:xfrm>
+          <a:prstGeom prst="rect">
+            <a:avLst/>
+          </a:prstGeom>
+          <a:noFill/>
+        </p:spPr>
+        <p:txBody>
+          <a:bodyPr wrap="square" anchor="t" lIns="0" rIns="0" tIns="0" bIns="0">
+            <a:spAutoFit/>
+          </a:bodyPr>
+          <a:lstStyle/>
+          <a:p>
+            <a:pPr algn="l">
+              <a:lnSpc>
+                <a:spcPct val="100000"/>
+              </a:lnSpc>
+            </a:pPr>
+            <a:r>
+              <a:rPr sz="1600" b="1" i="0">
+                <a:solidFill>
+                  <a:srgbClr val="D2D2D7"/>
+                </a:solidFill>
+                <a:latin typeface="Helvetica Neue"/>
+              </a:rPr>
+              <a:t>03</a:t>
+            </a:r>
+          </a:p>
+        </p:txBody>
+      </p:sp>
+      <p:sp>
+        <p:nvSpPr>
+          <p:cNvPr id="16" name="TextBox 15"/>
+          <p:cNvSpPr txBox="1"/>
+          <p:nvPr/>
+        </p:nvSpPr>
+        <p:spPr>
+          <a:xfrm>
+            <a:off x="7973568" y="2002536"/>
+            <a:ext cx="3200400" cy="256032"/>
+          </a:xfrm>
+          <a:prstGeom prst="rect">
+            <a:avLst/>
+          </a:prstGeom>
+          <a:noFill/>
+        </p:spPr>
+        <p:txBody>
+          <a:bodyPr wrap="square" anchor="t" lIns="0" rIns="0" tIns="0" bIns="0">
+            <a:spAutoFit/>
+          </a:bodyPr>
+          <a:lstStyle/>
+          <a:p>
+            <a:pPr algn="l">
+              <a:lnSpc>
+                <a:spcPct val="100000"/>
+              </a:lnSpc>
+            </a:pPr>
+            <a:r>
+              <a:rPr sz="1150" b="1" i="0">
+                <a:solidFill>
+                  <a:srgbClr val="1D1D1F"/>
+                </a:solidFill>
+                <a:latin typeface="Helvetica Neue"/>
+              </a:rPr>
+              <a:t>Payment Coverage</a:t>
+            </a:r>
+          </a:p>
+        </p:txBody>
+      </p:sp>
+      <p:sp>
+        <p:nvSpPr>
+          <p:cNvPr id="17" name="TextBox 16"/>
+          <p:cNvSpPr txBox="1"/>
+          <p:nvPr/>
+        </p:nvSpPr>
+        <p:spPr>
+          <a:xfrm>
+            <a:off x="7973568" y="2276856"/>
+            <a:ext cx="3200400" cy="1691640"/>
+          </a:xfrm>
+          <a:prstGeom prst="rect">
+            <a:avLst/>
+          </a:prstGeom>
+          <a:noFill/>
+        </p:spPr>
+        <p:txBody>
+          <a:bodyPr wrap="square" lIns="0" rIns="0" tIns="0" bIns="0">
+            <a:spAutoFit/>
+          </a:bodyPr>
+          <a:lstStyle/>
+          <a:p>
+            <a:pPr>
+              <a:lnSpc>
+                <a:spcPct val="108000"/>
+              </a:lnSpc>
+              <a:spcAft>
+                <a:spcPts val="400"/>
+              </a:spcAft>
+            </a:pPr>
+            <a:r>
+              <a:rPr sz="800">
+                <a:solidFill>
+                  <a:srgbClr val="1D1D1F"/>
+                </a:solidFill>
+                <a:latin typeface="Helvetica Neue"/>
+              </a:rPr>
+              <a:t>-  Fraction of each month's bill actually paid off (payratio1-payratio5).</a:t>
+            </a:r>
+          </a:p>
+          <a:p>
+            <a:pPr>
+              <a:lnSpc>
+                <a:spcPct val="108000"/>
+              </a:lnSpc>
+              <a:spcAft>
+                <a:spcPts val="400"/>
+              </a:spcAft>
+            </a:pPr>
+            <a:r>
+              <a:rPr sz="800">
+                <a:solidFill>
+                  <a:srgbClr val="1D1D1F"/>
+                </a:solidFill>
+                <a:latin typeface="Helvetica Neue"/>
+              </a:rPr>
+              <a:t>-  Average and worst month's payment coverage (payratio_mean, payratio_min).</a:t>
+            </a:r>
+          </a:p>
+          <a:p>
+            <a:pPr>
+              <a:lnSpc>
+                <a:spcPct val="108000"/>
+              </a:lnSpc>
+              <a:spcAft>
+                <a:spcPts val="400"/>
+              </a:spcAft>
+            </a:pPr>
+            <a:r>
+              <a:rPr sz="800">
+                <a:solidFill>
+                  <a:srgbClr val="1D1D1F"/>
+                </a:solidFill>
+                <a:latin typeface="Helvetica Neue"/>
+              </a:rPr>
+              <a:t>-  Months paid in full, and months paid nothing (paid_full_months, n_zero_pay).</a:t>
+            </a:r>
+          </a:p>
+          <a:p>
+            <a:pPr>
+              <a:lnSpc>
+                <a:spcPct val="108000"/>
+              </a:lnSpc>
+              <a:spcAft>
+                <a:spcPts val="400"/>
+              </a:spcAft>
+            </a:pPr>
+            <a:r>
+              <a:rPr sz="800">
+                <a:solidFill>
+                  <a:srgbClr val="1D1D1F"/>
+                </a:solidFill>
+                <a:latin typeface="Helvetica Neue"/>
+              </a:rPr>
+              <a:t>-  Hypothesis: paying a higher share each month predicts lower risk.</a:t>
+            </a:r>
+          </a:p>
+        </p:txBody>
+      </p:sp>
+      <p:sp>
+        <p:nvSpPr>
+          <p:cNvPr id="18" name="Rounded Rectangle 17"/>
+          <p:cNvSpPr/>
+          <p:nvPr/>
+        </p:nvSpPr>
+        <p:spPr>
+          <a:xfrm>
+            <a:off x="640080" y="4151376"/>
+            <a:ext cx="3456432" cy="2331720"/>
+          </a:xfrm>
+          <a:prstGeom prst="roundRect">
+            <a:avLst>
+              <a:gd name="adj" fmla="val 5000"/>
+            </a:avLst>
+          </a:prstGeom>
+          <a:solidFill>
+            <a:srgbClr val="FFFFFF"/>
+          </a:solidFill>
+          <a:ln w="12700">
+            <a:solidFill>
+              <a:srgbClr val="D2D2D7"/>
+            </a:solidFill>
+          </a:ln>
+          <a:effectLst/>
+        </p:spPr>
+        <p:style>
+          <a:lnRef idx="1">
+            <a:schemeClr val="accent1"/>
+          </a:lnRef>
+          <a:fillRef idx="3">
+            <a:schemeClr val="accent1"/>
+          </a:fillRef>
+          <a:effectRef idx="2">
+            <a:schemeClr val="accent1"/>
+          </a:effectRef>
+          <a:fontRef idx="minor">
+            <a:schemeClr val="lt1"/>
+          </a:fontRef>
+        </p:style>
+        <p:txBody>
+          <a:bodyPr rtlCol="0" anchor="ctr"/>
+          <a:lstStyle/>
+          <a:p>
+            <a:pPr algn="ctr"/>
+          </a:p>
+        </p:txBody>
+      </p:sp>
+      <p:sp>
+        <p:nvSpPr>
+          <p:cNvPr id="19" name="TextBox 18"/>
+          <p:cNvSpPr txBox="1"/>
+          <p:nvPr/>
+        </p:nvSpPr>
+        <p:spPr>
+          <a:xfrm>
+            <a:off x="768096" y="4224528"/>
+            <a:ext cx="548640" cy="274320"/>
+          </a:xfrm>
+          <a:prstGeom prst="rect">
+            <a:avLst/>
+          </a:prstGeom>
+          <a:noFill/>
+        </p:spPr>
+        <p:txBody>
+          <a:bodyPr wrap="square" anchor="t" lIns="0" rIns="0" tIns="0" bIns="0">
+            <a:spAutoFit/>
+          </a:bodyPr>
+          <a:lstStyle/>
+          <a:p>
+            <a:pPr algn="l">
+              <a:lnSpc>
+                <a:spcPct val="100000"/>
+              </a:lnSpc>
+            </a:pPr>
+            <a:r>
+              <a:rPr sz="1600" b="1" i="0">
+                <a:solidFill>
+                  <a:srgbClr val="D2D2D7"/>
+                </a:solidFill>
+                <a:latin typeface="Helvetica Neue"/>
+              </a:rPr>
+              <a:t>04</a:t>
+            </a:r>
+          </a:p>
+        </p:txBody>
+      </p:sp>
+      <p:sp>
+        <p:nvSpPr>
+          <p:cNvPr id="20" name="TextBox 19"/>
+          <p:cNvSpPr txBox="1"/>
+          <p:nvPr/>
+        </p:nvSpPr>
+        <p:spPr>
+          <a:xfrm>
+            <a:off x="768096" y="4462272"/>
+            <a:ext cx="3200400" cy="256032"/>
+          </a:xfrm>
+          <a:prstGeom prst="rect">
+            <a:avLst/>
+          </a:prstGeom>
+          <a:noFill/>
+        </p:spPr>
+        <p:txBody>
+          <a:bodyPr wrap="square" anchor="t" lIns="0" rIns="0" tIns="0" bIns="0">
+            <a:spAutoFit/>
+          </a:bodyPr>
+          <a:lstStyle/>
+          <a:p>
+            <a:pPr algn="l">
+              <a:lnSpc>
+                <a:spcPct val="100000"/>
+              </a:lnSpc>
+            </a:pPr>
+            <a:r>
+              <a:rPr sz="1150" b="1" i="0">
+                <a:solidFill>
+                  <a:srgbClr val="1D1D1F"/>
+                </a:solidFill>
+                <a:latin typeface="Helvetica Neue"/>
+              </a:rPr>
+              <a:t>Levels &amp; Momentum</a:t>
+            </a:r>
+          </a:p>
+        </p:txBody>
+      </p:sp>
+      <p:sp>
+        <p:nvSpPr>
+          <p:cNvPr id="21" name="TextBox 20"/>
+          <p:cNvSpPr txBox="1"/>
+          <p:nvPr/>
+        </p:nvSpPr>
+        <p:spPr>
+          <a:xfrm>
+            <a:off x="768096" y="4736592"/>
+            <a:ext cx="3200400" cy="1691640"/>
+          </a:xfrm>
+          <a:prstGeom prst="rect">
+            <a:avLst/>
+          </a:prstGeom>
+          <a:noFill/>
+        </p:spPr>
+        <p:txBody>
+          <a:bodyPr wrap="square" lIns="0" rIns="0" tIns="0" bIns="0">
+            <a:spAutoFit/>
+          </a:bodyPr>
+          <a:lstStyle/>
+          <a:p>
+            <a:pPr>
+              <a:lnSpc>
+                <a:spcPct val="108000"/>
+              </a:lnSpc>
+              <a:spcAft>
+                <a:spcPts val="400"/>
+              </a:spcAft>
+            </a:pPr>
+            <a:r>
+              <a:rPr sz="800">
+                <a:solidFill>
+                  <a:srgbClr val="1D1D1F"/>
+                </a:solidFill>
+                <a:latin typeface="Helvetica Neue"/>
+              </a:rPr>
+              <a:t>-  Calculated: total/average dollars billed and paid (bill_sum/mean, amt_sum/mean); overall coverage (coverage_total); raw balance change (bill_growth); spend vs. limit and a log-scaled limit (amt_over_limit, log_limit).</a:t>
+            </a:r>
+          </a:p>
+          <a:p>
+            <a:pPr>
+              <a:lnSpc>
+                <a:spcPct val="108000"/>
+              </a:lnSpc>
+              <a:spcAft>
+                <a:spcPts val="400"/>
+              </a:spcAft>
+            </a:pPr>
+            <a:r>
+              <a:rPr sz="800">
+                <a:solidFill>
+                  <a:srgbClr val="1D1D1F"/>
+                </a:solidFill>
+                <a:latin typeface="Helvetica Neue"/>
+              </a:rPr>
+              <a:t>-  Used: fed to all three models identically, same 81-feature matrix. Restores scale the ratio families strip out; trees don't need it, the GRU does.</a:t>
+            </a:r>
+          </a:p>
+        </p:txBody>
+      </p:sp>
+      <p:sp>
+        <p:nvSpPr>
+          <p:cNvPr id="22" name="Rounded Rectangle 21"/>
+          <p:cNvSpPr/>
+          <p:nvPr/>
+        </p:nvSpPr>
+        <p:spPr>
+          <a:xfrm>
+            <a:off x="7845552" y="4151376"/>
+            <a:ext cx="3456432" cy="2331720"/>
+          </a:xfrm>
+          <a:prstGeom prst="roundRect">
+            <a:avLst>
+              <a:gd name="adj" fmla="val 5000"/>
+            </a:avLst>
+          </a:prstGeom>
+          <a:solidFill>
+            <a:srgbClr val="FFFFFF"/>
+          </a:solidFill>
+          <a:ln w="12700">
+            <a:solidFill>
+              <a:srgbClr val="D2D2D7"/>
+            </a:solidFill>
+          </a:ln>
+          <a:effectLst/>
+        </p:spPr>
+        <p:style>
+          <a:lnRef idx="1">
+            <a:schemeClr val="accent1"/>
+          </a:lnRef>
+          <a:fillRef idx="3">
+            <a:schemeClr val="accent1"/>
+          </a:fillRef>
+          <a:effectRef idx="2">
+            <a:schemeClr val="accent1"/>
+          </a:effectRef>
+          <a:fontRef idx="minor">
+            <a:schemeClr val="lt1"/>
+          </a:fontRef>
+        </p:style>
+        <p:txBody>
+          <a:bodyPr rtlCol="0" anchor="ctr"/>
+          <a:lstStyle/>
+          <a:p>
+            <a:pPr algn="ctr"/>
+          </a:p>
+        </p:txBody>
+      </p:sp>
+      <p:sp>
+        <p:nvSpPr>
+          <p:cNvPr id="23" name="TextBox 22"/>
+          <p:cNvSpPr txBox="1"/>
+          <p:nvPr/>
+        </p:nvSpPr>
+        <p:spPr>
+          <a:xfrm>
+            <a:off x="7973568" y="4224528"/>
+            <a:ext cx="548640" cy="274320"/>
+          </a:xfrm>
+          <a:prstGeom prst="rect">
+            <a:avLst/>
+          </a:prstGeom>
+          <a:noFill/>
+        </p:spPr>
+        <p:txBody>
+          <a:bodyPr wrap="square" anchor="t" lIns="0" rIns="0" tIns="0" bIns="0">
+            <a:spAutoFit/>
+          </a:bodyPr>
+          <a:lstStyle/>
+          <a:p>
+            <a:pPr algn="l">
+              <a:lnSpc>
+                <a:spcPct val="100000"/>
+              </a:lnSpc>
+            </a:pPr>
+            <a:r>
+              <a:rPr sz="1600" b="1" i="0">
+                <a:solidFill>
+                  <a:srgbClr val="D2D2D7"/>
+                </a:solidFill>
+                <a:latin typeface="Helvetica Neue"/>
+              </a:rPr>
+              <a:t>06</a:t>
+            </a:r>
+          </a:p>
+        </p:txBody>
+      </p:sp>
+      <p:sp>
+        <p:nvSpPr>
+          <p:cNvPr id="24" name="TextBox 23"/>
+          <p:cNvSpPr txBox="1"/>
+          <p:nvPr/>
+        </p:nvSpPr>
+        <p:spPr>
+          <a:xfrm>
+            <a:off x="7973568" y="4462272"/>
+            <a:ext cx="3200400" cy="256032"/>
+          </a:xfrm>
+          <a:prstGeom prst="rect">
+            <a:avLst/>
+          </a:prstGeom>
+          <a:noFill/>
+        </p:spPr>
+        <p:txBody>
+          <a:bodyPr wrap="square" anchor="t" lIns="0" rIns="0" tIns="0" bIns="0">
+            <a:spAutoFit/>
+          </a:bodyPr>
+          <a:lstStyle/>
+          <a:p>
+            <a:pPr algn="l">
+              <a:lnSpc>
+                <a:spcPct val="100000"/>
+              </a:lnSpc>
+            </a:pPr>
+            <a:r>
+              <a:rPr sz="1150" b="1" i="0">
+                <a:solidFill>
+                  <a:srgbClr val="1D1D1F"/>
+                </a:solidFill>
+                <a:latin typeface="Helvetica Neue"/>
+              </a:rPr>
+              <a:t>Minimum-Payment Behaviour</a:t>
+            </a:r>
+          </a:p>
+        </p:txBody>
+      </p:sp>
+      <p:sp>
+        <p:nvSpPr>
+          <p:cNvPr id="25" name="TextBox 24"/>
+          <p:cNvSpPr txBox="1"/>
+          <p:nvPr/>
+        </p:nvSpPr>
+        <p:spPr>
+          <a:xfrm>
+            <a:off x="7973568" y="4736592"/>
+            <a:ext cx="3200400" cy="1691640"/>
+          </a:xfrm>
+          <a:prstGeom prst="rect">
+            <a:avLst/>
+          </a:prstGeom>
+          <a:noFill/>
+        </p:spPr>
+        <p:txBody>
+          <a:bodyPr wrap="square" lIns="0" rIns="0" tIns="0" bIns="0">
+            <a:spAutoFit/>
+          </a:bodyPr>
+          <a:lstStyle/>
+          <a:p>
+            <a:pPr>
+              <a:lnSpc>
+                <a:spcPct val="108000"/>
+              </a:lnSpc>
+              <a:spcAft>
+                <a:spcPts val="400"/>
+              </a:spcAft>
+            </a:pPr>
+            <a:r>
+              <a:rPr sz="800">
+                <a:solidFill>
+                  <a:srgbClr val="1D1D1F"/>
+                </a:solidFill>
+                <a:latin typeface="Helvetica Neue"/>
+              </a:rPr>
+              <a:t>-  How close payments are to the assumed 10% minimum due, on average and at worst (min_pay_ratio_mean/min).</a:t>
+            </a:r>
+          </a:p>
+          <a:p>
+            <a:pPr>
+              <a:lnSpc>
+                <a:spcPct val="108000"/>
+              </a:lnSpc>
+              <a:spcAft>
+                <a:spcPts val="400"/>
+              </a:spcAft>
+            </a:pPr>
+            <a:r>
+              <a:rPr sz="800">
+                <a:solidFill>
+                  <a:srgbClr val="1D1D1F"/>
+                </a:solidFill>
+                <a:latin typeface="Helvetica Neue"/>
+              </a:rPr>
+              <a:t>-  Months paying only around the minimum, a sign of financial strain (months_paid_about_min).</a:t>
+            </a:r>
+          </a:p>
+          <a:p>
+            <a:pPr>
+              <a:lnSpc>
+                <a:spcPct val="108000"/>
+              </a:lnSpc>
+              <a:spcAft>
+                <a:spcPts val="400"/>
+              </a:spcAft>
+            </a:pPr>
+            <a:r>
+              <a:rPr sz="800">
+                <a:solidFill>
+                  <a:srgbClr val="1D1D1F"/>
+                </a:solidFill>
+                <a:latin typeface="Helvetica Neue"/>
+              </a:rPr>
+              <a:t>-  Months paying even less than the minimum due (months_paid_under_min).</a:t>
+            </a:r>
+          </a:p>
+        </p:txBody>
+      </p:sp>
+      <p:sp>
+        <p:nvSpPr>
+          <p:cNvPr id="26" name="Rounded Rectangle 25"/>
+          <p:cNvSpPr/>
+          <p:nvPr/>
+        </p:nvSpPr>
+        <p:spPr>
+          <a:xfrm>
+            <a:off x="4242816" y="4151376"/>
+            <a:ext cx="3456432" cy="2331720"/>
+          </a:xfrm>
+          <a:prstGeom prst="roundRect">
+            <a:avLst>
+              <a:gd name="adj" fmla="val 5000"/>
+            </a:avLst>
+          </a:prstGeom>
+          <a:solidFill>
+            <a:srgbClr val="E8F2FF"/>
+          </a:solidFill>
+          <a:ln w="19050">
+            <a:solidFill>
+              <a:srgbClr val="0071E3"/>
+            </a:solidFill>
+          </a:ln>
+          <a:effectLst/>
+        </p:spPr>
+        <p:style>
+          <a:lnRef idx="1">
+            <a:schemeClr val="accent1"/>
+          </a:lnRef>
+          <a:fillRef idx="3">
+            <a:schemeClr val="accent1"/>
+          </a:fillRef>
+          <a:effectRef idx="2">
+            <a:schemeClr val="accent1"/>
+          </a:effectRef>
+          <a:fontRef idx="minor">
+            <a:schemeClr val="lt1"/>
+          </a:fontRef>
+        </p:style>
+        <p:txBody>
+          <a:bodyPr rtlCol="0" anchor="ctr"/>
+          <a:lstStyle/>
+          <a:p>
+            <a:pPr algn="ctr"/>
+          </a:p>
+        </p:txBody>
+      </p:sp>
+      <p:sp>
+        <p:nvSpPr>
+          <p:cNvPr id="27" name="TextBox 26"/>
+          <p:cNvSpPr txBox="1"/>
+          <p:nvPr/>
+        </p:nvSpPr>
+        <p:spPr>
+          <a:xfrm>
+            <a:off x="4370832" y="4224528"/>
+            <a:ext cx="548640" cy="274320"/>
+          </a:xfrm>
+          <a:prstGeom prst="rect">
+            <a:avLst/>
+          </a:prstGeom>
+          <a:noFill/>
+        </p:spPr>
+        <p:txBody>
+          <a:bodyPr wrap="square" anchor="t" lIns="0" rIns="0" tIns="0" bIns="0">
+            <a:spAutoFit/>
+          </a:bodyPr>
+          <a:lstStyle/>
+          <a:p>
+            <a:pPr algn="l">
+              <a:lnSpc>
+                <a:spcPct val="100000"/>
+              </a:lnSpc>
+            </a:pPr>
+            <a:r>
+              <a:rPr sz="1600" b="1" i="0">
+                <a:solidFill>
+                  <a:srgbClr val="D2D2D7"/>
+                </a:solidFill>
+                <a:latin typeface="Helvetica Neue"/>
+              </a:rPr>
+              <a:t>05</a:t>
+            </a:r>
+          </a:p>
+        </p:txBody>
+      </p:sp>
+      <p:sp>
+        <p:nvSpPr>
+          <p:cNvPr id="28" name="TextBox 27"/>
+          <p:cNvSpPr txBox="1"/>
+          <p:nvPr/>
+        </p:nvSpPr>
+        <p:spPr>
+          <a:xfrm>
+            <a:off x="4370832" y="4462272"/>
+            <a:ext cx="3200400" cy="256032"/>
+          </a:xfrm>
+          <a:prstGeom prst="rect">
+            <a:avLst/>
+          </a:prstGeom>
+          <a:noFill/>
+        </p:spPr>
+        <p:txBody>
+          <a:bodyPr wrap="square" anchor="t" lIns="0" rIns="0" tIns="0" bIns="0">
+            <a:spAutoFit/>
+          </a:bodyPr>
+          <a:lstStyle/>
+          <a:p>
+            <a:pPr algn="l">
+              <a:lnSpc>
+                <a:spcPct val="100000"/>
+              </a:lnSpc>
+            </a:pPr>
+            <a:r>
+              <a:rPr sz="1150" b="1" i="0">
+                <a:solidFill>
+                  <a:srgbClr val="0057B8"/>
+                </a:solidFill>
+                <a:latin typeface="Helvetica Neue"/>
+              </a:rPr>
+              <a:t>Spending Decomposition</a:t>
+            </a:r>
+          </a:p>
+        </p:txBody>
+      </p:sp>
+      <p:sp>
+        <p:nvSpPr>
+          <p:cNvPr id="29" name="TextBox 28"/>
+          <p:cNvSpPr txBox="1"/>
+          <p:nvPr/>
+        </p:nvSpPr>
+        <p:spPr>
+          <a:xfrm>
+            <a:off x="4370832" y="4736592"/>
+            <a:ext cx="3200400" cy="1691640"/>
+          </a:xfrm>
+          <a:prstGeom prst="rect">
+            <a:avLst/>
+          </a:prstGeom>
+          <a:noFill/>
+        </p:spPr>
+        <p:txBody>
+          <a:bodyPr wrap="square" lIns="0" rIns="0" tIns="0" bIns="0">
+            <a:spAutoFit/>
+          </a:bodyPr>
+          <a:lstStyle/>
+          <a:p>
+            <a:pPr>
+              <a:lnSpc>
+                <a:spcPct val="108000"/>
+              </a:lnSpc>
+              <a:spcAft>
+                <a:spcPts val="400"/>
+              </a:spcAft>
+            </a:pPr>
+            <a:r>
+              <a:rPr sz="800">
+                <a:solidFill>
+                  <a:srgbClr val="1D1D1F"/>
+                </a:solidFill>
+                <a:latin typeface="Helvetica Neue"/>
+              </a:rPr>
+              <a:t>-  spend_t = BILL_t - BILL_(t+1) + PAY_AMT_t</a:t>
+            </a:r>
+          </a:p>
+          <a:p>
+            <a:pPr>
+              <a:lnSpc>
+                <a:spcPct val="108000"/>
+              </a:lnSpc>
+              <a:spcAft>
+                <a:spcPts val="400"/>
+              </a:spcAft>
+            </a:pPr>
+            <a:r>
+              <a:rPr sz="800">
+                <a:solidFill>
+                  <a:srgbClr val="1D1D1F"/>
+                </a:solidFill>
+                <a:latin typeface="Helvetica Neue"/>
+              </a:rPr>
+              <a:t>-  Estimated dollars spent each month, plus average, peak and trend (spend1-spend5, spend_mean/max/trend).</a:t>
+            </a:r>
+          </a:p>
+          <a:p>
+            <a:pPr>
+              <a:lnSpc>
+                <a:spcPct val="108000"/>
+              </a:lnSpc>
+              <a:spcAft>
+                <a:spcPts val="400"/>
+              </a:spcAft>
+            </a:pPr>
+            <a:r>
+              <a:rPr sz="800">
+                <a:solidFill>
+                  <a:srgbClr val="1D1D1F"/>
+                </a:solidFill>
+                <a:latin typeface="Helvetica Neue"/>
+              </a:rPr>
+              <a:t>-  Months where new spending outpaced repayment (spend_minus_paid, months_spend_gt_paid).</a:t>
+            </a:r>
+          </a:p>
+          <a:p>
+            <a:pPr>
+              <a:lnSpc>
+                <a:spcPct val="108000"/>
+              </a:lnSpc>
+              <a:spcAft>
+                <a:spcPts val="400"/>
+              </a:spcAft>
+            </a:pPr>
+            <a:r>
+              <a:rPr sz="800">
+                <a:solidFill>
+                  <a:srgbClr val="1D1D1F"/>
+                </a:solidFill>
+                <a:latin typeface="Helvetica Neue"/>
+              </a:rPr>
+              <a:t>-  Separates "spent more" from "stopped paying" as the reason a balance rises.</a:t>
+            </a:r>
+          </a:p>
+          <a:p>
+            <a:pPr>
+              <a:lnSpc>
+                <a:spcPct val="108000"/>
+              </a:lnSpc>
+              <a:spcAft>
+                <a:spcPts val="400"/>
+              </a:spcAft>
+            </a:pPr>
+            <a:r>
+              <a:rPr sz="800">
+                <a:solidFill>
+                  <a:srgbClr val="1D1D1F"/>
+                </a:solidFill>
+                <a:latin typeface="Helvetica Neue"/>
+              </a:rPr>
+              <a:t>-  +0.00046 OOF / +0.00173 hidden test, the largest gain of the whole project.</a:t>
+            </a:r>
+          </a:p>
+        </p:txBody>
+      </p:sp>
+      <p:sp>
+        <p:nvSpPr>
+          <p:cNvPr id="30" name="TextBox 29"/>
+          <p:cNvSpPr txBox="1"/>
+          <p:nvPr/>
+        </p:nvSpPr>
+        <p:spPr>
+          <a:xfrm>
+            <a:off x="640080" y="6519672"/>
+            <a:ext cx="10881360" cy="274320"/>
+          </a:xfrm>
+          <a:prstGeom prst="rect">
+            <a:avLst/>
+          </a:prstGeom>
+          <a:noFill/>
+        </p:spPr>
+        <p:txBody>
+          <a:bodyPr wrap="square" anchor="t" lIns="0" rIns="0" tIns="0" bIns="0">
+            <a:spAutoFit/>
+          </a:bodyPr>
+          <a:lstStyle/>
+          <a:p>
+            <a:pPr algn="l">
+              <a:lnSpc>
+                <a:spcPct val="100000"/>
+              </a:lnSpc>
+            </a:pPr>
+            <a:r>
+              <a:rPr sz="1050" b="0" i="0">
                 <a:solidFill>
                   <a:srgbClr val="6E6E73"/>
                 </a:solidFill>
                 <a:latin typeface="Helvetica Neue"/>
               </a:rPr>
-              <a:t>Statement balances and payments are given, monthly account activity is not.</a:t>
-            </a:r>
-          </a:p>
-        </p:txBody>
-      </p:sp>
-      <p:pic>
-        <p:nvPicPr>
-          <p:cNvPr id="6" name="Picture 5" descr="spend_proxy.png"/>
-          <p:cNvPicPr>
-            <a:picLocks noChangeAspect="1"/>
-          </p:cNvPicPr>
-          <p:nvPr/>
-        </p:nvPicPr>
-        <p:blipFill>
-          <a:blip r:embed="rId2"/>
-          <a:stretch>
-            <a:fillRect/>
-          </a:stretch>
-        </p:blipFill>
-        <p:spPr>
-          <a:xfrm>
-            <a:off x="2978620" y="2286000"/>
-            <a:ext cx="6204278" cy="1737360"/>
-          </a:xfrm>
-          <a:prstGeom prst="rect">
-            <a:avLst/>
-          </a:prstGeom>
-        </p:spPr>
-      </p:pic>
-      <p:sp>
-        <p:nvSpPr>
-          <p:cNvPr id="7" name="TextBox 6"/>
-          <p:cNvSpPr txBox="1"/>
-          <p:nvPr/>
-        </p:nvSpPr>
-        <p:spPr>
-          <a:xfrm>
-            <a:off x="640080" y="4160520"/>
-            <a:ext cx="5669280" cy="822960"/>
-          </a:xfrm>
-          <a:prstGeom prst="rect">
-            <a:avLst/>
-          </a:prstGeom>
-          <a:noFill/>
-        </p:spPr>
-        <p:txBody>
-          <a:bodyPr wrap="square" anchor="t" lIns="0" rIns="0" tIns="0" bIns="0">
-            <a:spAutoFit/>
-          </a:bodyPr>
-          <a:lstStyle/>
-          <a:p>
-            <a:pPr algn="l">
-              <a:lnSpc>
-                <a:spcPct val="100000"/>
-              </a:lnSpc>
-            </a:pPr>
-            <a:r>
-              <a:rPr sz="1550" b="0" i="0">
-                <a:solidFill>
-                  <a:srgbClr val="1D1D1F"/>
-                </a:solidFill>
-                <a:latin typeface="Helvetica Neue"/>
-              </a:rPr>
-              <a:t>A rising balance from new spending is a different risk story than one from missed payments, this proxy tells them apart.</a:t>
-            </a:r>
-          </a:p>
-        </p:txBody>
-      </p:sp>
-      <p:pic>
-        <p:nvPicPr>
-          <p:cNvPr id="8" name="Picture 7" descr="feature_family_gains.png"/>
-          <p:cNvPicPr>
-            <a:picLocks noChangeAspect="1"/>
-          </p:cNvPicPr>
-          <p:nvPr/>
-        </p:nvPicPr>
-        <p:blipFill>
-          <a:blip r:embed="rId3"/>
-          <a:stretch>
-            <a:fillRect/>
-          </a:stretch>
-        </p:blipFill>
-        <p:spPr>
-          <a:xfrm>
-            <a:off x="6349238" y="3977639"/>
-            <a:ext cx="5132322" cy="2514600"/>
-          </a:xfrm>
-          <a:prstGeom prst="rect">
-            <a:avLst/>
-          </a:prstGeom>
-        </p:spPr>
-      </p:pic>
-      <p:sp>
-        <p:nvSpPr>
-          <p:cNvPr id="9" name="TextBox 8"/>
-          <p:cNvSpPr txBox="1"/>
-          <p:nvPr/>
-        </p:nvSpPr>
-        <p:spPr>
-          <a:xfrm>
-            <a:off x="640080" y="5166360"/>
-            <a:ext cx="5669280" cy="1005840"/>
-          </a:xfrm>
-          <a:prstGeom prst="rect">
-            <a:avLst/>
-          </a:prstGeom>
-          <a:noFill/>
-        </p:spPr>
-        <p:txBody>
-          <a:bodyPr wrap="square" anchor="t" lIns="0" rIns="0" tIns="0" bIns="0">
-            <a:spAutoFit/>
-          </a:bodyPr>
-          <a:lstStyle/>
-          <a:p>
-            <a:pPr algn="l">
-              <a:lnSpc>
-                <a:spcPct val="120000"/>
-              </a:lnSpc>
-            </a:pPr>
-            <a:r>
-              <a:rPr sz="1550" b="1" i="0">
-                <a:solidFill>
-                  <a:srgbClr val="0057B8"/>
-                </a:solidFill>
-                <a:latin typeface="Helvetica Neue"/>
-              </a:rPr>
-              <a:t>+0.00046 OOF log loss  ·  +0.00173 hidden-test log loss.</a:t>
-            </a:r>
-          </a:p>
-          <a:p>
-            <a:pPr algn="l">
-              <a:lnSpc>
-                <a:spcPct val="120000"/>
-              </a:lnSpc>
-            </a:pPr>
-            <a:r>
-              <a:rPr sz="1550" b="1" i="0">
-                <a:solidFill>
-                  <a:srgbClr val="0057B8"/>
-                </a:solidFill>
-                <a:latin typeface="Helvetica Neue"/>
-              </a:rPr>
-              <a:t>Six other feature families never cleared the 0.0005 noise threshold.</a:t>
-            </a:r>
-          </a:p>
-        </p:txBody>
-      </p:sp>
-      <p:sp>
-        <p:nvSpPr>
-          <p:cNvPr id="10" name="TextBox 9"/>
+              <a:t>Six additional feature families were tried and rejected (behavioural signatures, spend-as-sequence, interaction terms, peer-relative limit, velocity/acceleration, target encoding); none cleared the 0.0005 noise threshold.</a:t>
+            </a:r>
+          </a:p>
+        </p:txBody>
+      </p:sp>
+      <p:sp>
+        <p:nvSpPr>
+          <p:cNvPr id="31" name="TextBox 30"/>
           <p:cNvSpPr txBox="1"/>
           <p:nvPr/>
         </p:nvSpPr>

--- a/presentation/finalist-presentation.pptx
+++ b/presentation/finalist-presentation.pptx
@@ -20,7 +20,6 @@
     <p:sldId id="268" r:id="rId20"/>
     <p:sldId id="269" r:id="rId21"/>
     <p:sldId id="270" r:id="rId22"/>
-    <p:sldId id="271" r:id="rId23"/>
   </p:sldIdLst>
   <p:sldSz cx="12191695" cy="6858000" type="screen4x3"/>
   <p:notesSz cx="6858000" cy="9144000"/>
@@ -4636,7 +4635,7 @@
                 </a:solidFill>
                 <a:latin typeface="Helvetica Neue"/>
               </a:rPr>
-              <a:t>Full experiment ledger (41 experiments)</a:t>
+              <a:t>41 experiments, grouped</a:t>
             </a:r>
           </a:p>
         </p:txBody>
@@ -4672,13 +4671,13 @@
               </a:spcAft>
             </a:pPr>
             <a:r>
-              <a:rPr sz="1650">
+              <a:rPr sz="1450">
                 <a:solidFill>
                   <a:srgbClr val="1D1D1F"/>
                 </a:solidFill>
                 <a:latin typeface="Helvetica Neue"/>
               </a:rPr>
-              <a:t>-  10 model families, 7 candidate feature families, 135 LightGBM configurations, 8 ensembling/calibration schemes, grouped as successful, neutral or harmful in docs/experiment-ledger.html.</a:t>
+              <a:t>-  Successful (4): log-loss alignment + GRU added (0.41260); full-data refit for the GRU (-0.00023); repeated CV, 3 -&gt; 6 partitions (-0.00026); spending decomposition + tuned GRU (-0.00173).</a:t>
             </a:r>
           </a:p>
           <a:p>
@@ -4691,13 +4690,13 @@
               </a:spcAft>
             </a:pPr>
             <a:r>
-              <a:rPr sz="1650">
+              <a:rPr sz="1450">
                 <a:solidFill>
                   <a:srgbClr val="1D1D1F"/>
                 </a:solidFill>
                 <a:latin typeface="Helvetica Neue"/>
               </a:rPr>
-              <a:t>-  Survival model: +0.00027 OOF but worse hidden test (0.41044 vs. 0.41038), removed.</a:t>
+              <a:t>-  Other models &amp; tuning, rejected: 135 LightGBM configs (best +0.00004); 1D-CNN, corr. 0.9924 w/ GRU (0.42601); autoencoder (0.42685); MLP (0.42882); CatBoost/ExtraTrees/LogReg/multi-task GRU (weight 0.00); pseudo-labelling the test set (-0.00024).</a:t>
             </a:r>
           </a:p>
           <a:p>
@@ -4710,13 +4709,13 @@
               </a:spcAft>
             </a:pPr>
             <a:r>
-              <a:rPr sz="1650">
+              <a:rPr sz="1450">
                 <a:solidFill>
                   <a:srgbClr val="1D1D1F"/>
                 </a:solidFill>
                 <a:latin typeface="Helvetica Neue"/>
               </a:rPr>
-              <a:t>-  5 techniques from the AMEX Kaggle write-ups tested (DART, high min_data_in_leaf, feature_fraction_bynode, recency-window aggregates, within-customer ranks), none adopted.</a:t>
+              <a:t>-  Techniques from the AMEX Kaggle winners (5, none adopted): DART boosting (-0.00072); high min_data_in_leaf, 2048 (-0.00104); feature_fraction_bynode (-0.00011); recency windows / within-customer ranks (-0.00035); denoising / rank blending (not applicable).</a:t>
             </a:r>
           </a:p>
           <a:p>
@@ -4729,13 +4728,32 @@
               </a:spcAft>
             </a:pPr>
             <a:r>
-              <a:rPr sz="1650">
+              <a:rPr sz="1450">
                 <a:solidFill>
                   <a:srgbClr val="1D1D1F"/>
                 </a:solidFill>
                 <a:latin typeface="Helvetica Neue"/>
               </a:rPr>
-              <a:t>-  Next investigation is new information, not further tuning: e.g. whether EDUCATION "other" is a genuinely homogeneous group.</a:t>
+              <a:t>-  Harmful, caught and reverted: survival/hazard model improved OOF by +0.00027 but hidden test got worse (0.41044 vs. 0.41038 without it), dropped despite the OOF gain. Isotonic calibration looked like the best result on OOF; was leakage (fit and scored on the same rows); under nested CV became the single worst result (-0.00330).</a:t>
+            </a:r>
+          </a:p>
+          <a:p>
+            <a:pPr>
+              <a:lnSpc>
+                <a:spcPct val="108000"/>
+              </a:lnSpc>
+              <a:spcAft>
+                <a:spcPts val="1000"/>
+              </a:spcAft>
+            </a:pPr>
+            <a:r>
+              <a:rPr sz="1450">
+                <a:solidFill>
+                  <a:srgbClr val="1D1D1F"/>
+                </a:solidFill>
+                <a:latin typeface="Helvetica Neue"/>
+              </a:rPr>
+              <a:t>-  Next investigation: whether the EDUCATION "other" codes are a genuinely homogeneous group, or should be split.</a:t>
             </a:r>
           </a:p>
         </p:txBody>
@@ -6020,302 +6038,6 @@
 </p:sld>
 </file>
 
-<file path=ppt/slides/slide16.xml><?xml version="1.0" encoding="utf-8"?>
-<p:sld xmlns:a="http://schemas.openxmlformats.org/drawingml/2006/main" xmlns:p="http://schemas.openxmlformats.org/presentationml/2006/main" xmlns:r="http://schemas.openxmlformats.org/officeDocument/2006/relationships">
-  <p:cSld>
-    <p:spTree>
-      <p:nvGrpSpPr>
-        <p:cNvPr id="1" name=""/>
-        <p:cNvGrpSpPr/>
-        <p:nvPr/>
-      </p:nvGrpSpPr>
-      <p:grpSpPr/>
-      <p:sp>
-        <p:nvSpPr>
-          <p:cNvPr id="2" name="Rectangle 1"/>
-          <p:cNvSpPr/>
-          <p:nvPr/>
-        </p:nvSpPr>
-        <p:spPr>
-          <a:xfrm>
-            <a:off x="0" y="0"/>
-            <a:ext cx="12191695" cy="6858000"/>
-          </a:xfrm>
-          <a:prstGeom prst="rect">
-            <a:avLst/>
-          </a:prstGeom>
-          <a:solidFill>
-            <a:srgbClr val="F5F5F7"/>
-          </a:solidFill>
-          <a:ln>
-            <a:noFill/>
-          </a:ln>
-          <a:effectLst/>
-        </p:spPr>
-        <p:style>
-          <a:lnRef idx="1">
-            <a:schemeClr val="accent1"/>
-          </a:lnRef>
-          <a:fillRef idx="3">
-            <a:schemeClr val="accent1"/>
-          </a:fillRef>
-          <a:effectRef idx="2">
-            <a:schemeClr val="accent1"/>
-          </a:effectRef>
-          <a:fontRef idx="minor">
-            <a:schemeClr val="lt1"/>
-          </a:fontRef>
-        </p:style>
-        <p:txBody>
-          <a:bodyPr rtlCol="0" anchor="ctr"/>
-          <a:lstStyle/>
-          <a:p>
-            <a:pPr algn="ctr"/>
-          </a:p>
-        </p:txBody>
-      </p:sp>
-      <p:sp>
-        <p:nvSpPr>
-          <p:cNvPr id="3" name="TextBox 2"/>
-          <p:cNvSpPr txBox="1"/>
-          <p:nvPr/>
-        </p:nvSpPr>
-        <p:spPr>
-          <a:xfrm>
-            <a:off x="640080" y="457200"/>
-            <a:ext cx="5486400" cy="365760"/>
-          </a:xfrm>
-          <a:prstGeom prst="rect">
-            <a:avLst/>
-          </a:prstGeom>
-          <a:noFill/>
-        </p:spPr>
-        <p:txBody>
-          <a:bodyPr wrap="square" anchor="t" lIns="0" rIns="0" tIns="0" bIns="0">
-            <a:spAutoFit/>
-          </a:bodyPr>
-          <a:lstStyle/>
-          <a:p>
-            <a:pPr algn="l">
-              <a:lnSpc>
-                <a:spcPct val="100000"/>
-              </a:lnSpc>
-            </a:pPr>
-            <a:r>
-              <a:rPr sz="1250" b="1" i="0">
-                <a:solidFill>
-                  <a:srgbClr val="0071E3"/>
-                </a:solidFill>
-                <a:latin typeface="Helvetica Neue"/>
-              </a:rPr>
-              <a:t>APPENDIX · A8</a:t>
-            </a:r>
-          </a:p>
-        </p:txBody>
-      </p:sp>
-      <p:sp>
-        <p:nvSpPr>
-          <p:cNvPr id="4" name="TextBox 3"/>
-          <p:cNvSpPr txBox="1"/>
-          <p:nvPr/>
-        </p:nvSpPr>
-        <p:spPr>
-          <a:xfrm>
-            <a:off x="640080" y="777240"/>
-            <a:ext cx="10881360" cy="914400"/>
-          </a:xfrm>
-          <a:prstGeom prst="rect">
-            <a:avLst/>
-          </a:prstGeom>
-          <a:noFill/>
-        </p:spPr>
-        <p:txBody>
-          <a:bodyPr wrap="square" anchor="t" lIns="0" rIns="0" tIns="0" bIns="0">
-            <a:spAutoFit/>
-          </a:bodyPr>
-          <a:lstStyle/>
-          <a:p>
-            <a:pPr algn="l">
-              <a:lnSpc>
-                <a:spcPct val="100000"/>
-              </a:lnSpc>
-            </a:pPr>
-            <a:r>
-              <a:rPr sz="2800" b="1" i="0">
-                <a:solidFill>
-                  <a:srgbClr val="1D1D1F"/>
-                </a:solidFill>
-                <a:latin typeface="Helvetica Neue"/>
-              </a:rPr>
-              <a:t>Full feature engineering breakdown, all six families</a:t>
-            </a:r>
-          </a:p>
-        </p:txBody>
-      </p:sp>
-      <p:sp>
-        <p:nvSpPr>
-          <p:cNvPr id="5" name="TextBox 4"/>
-          <p:cNvSpPr txBox="1"/>
-          <p:nvPr/>
-        </p:nvSpPr>
-        <p:spPr>
-          <a:xfrm>
-            <a:off x="640080" y="1645920"/>
-            <a:ext cx="10911535" cy="4754880"/>
-          </a:xfrm>
-          <a:prstGeom prst="rect">
-            <a:avLst/>
-          </a:prstGeom>
-          <a:noFill/>
-        </p:spPr>
-        <p:txBody>
-          <a:bodyPr wrap="square" lIns="0" rIns="0" tIns="0" bIns="0">
-            <a:spAutoFit/>
-          </a:bodyPr>
-          <a:lstStyle/>
-          <a:p>
-            <a:pPr>
-              <a:lnSpc>
-                <a:spcPct val="108000"/>
-              </a:lnSpc>
-              <a:spcAft>
-                <a:spcPts val="1000"/>
-              </a:spcAft>
-            </a:pPr>
-            <a:r>
-              <a:rPr sz="1400">
-                <a:solidFill>
-                  <a:srgbClr val="1D1D1F"/>
-                </a:solidFill>
-                <a:latin typeface="Helvetica Neue"/>
-              </a:rPr>
-              <a:t>-  01 Repayment Status History: pay_max/sum/mean/std (lateness stats), n_late/n_late2plus (count late months), trend_pay, max_late_streak, recent_late, months_since_late, and ever_paid_full/never_used (read from the original, uncollapsed PAY codes).</a:t>
-            </a:r>
-          </a:p>
-          <a:p>
-            <a:pPr>
-              <a:lnSpc>
-                <a:spcPct val="108000"/>
-              </a:lnSpc>
-              <a:spcAft>
-                <a:spcPts val="1000"/>
-              </a:spcAft>
-            </a:pPr>
-            <a:r>
-              <a:rPr sz="1400">
-                <a:solidFill>
-                  <a:srgbClr val="1D1D1F"/>
-                </a:solidFill>
-                <a:latin typeface="Helvetica Neue"/>
-              </a:rPr>
-              <a:t>-  02 Credit Utilisation: util1-util6 (balance / limit each month), util_mean/max/trend, avail_credit (limit minus the most recent bill).</a:t>
-            </a:r>
-          </a:p>
-          <a:p>
-            <a:pPr>
-              <a:lnSpc>
-                <a:spcPct val="108000"/>
-              </a:lnSpc>
-              <a:spcAft>
-                <a:spcPts val="1000"/>
-              </a:spcAft>
-            </a:pPr>
-            <a:r>
-              <a:rPr sz="1400">
-                <a:solidFill>
-                  <a:srgbClr val="1D1D1F"/>
-                </a:solidFill>
-                <a:latin typeface="Helvetica Neue"/>
-              </a:rPr>
-              <a:t>-  03 Payment Coverage: payratio1-payratio5 (fraction of each bill actually paid), payratio_mean/min, paid_full_months, n_zero_pay.</a:t>
-            </a:r>
-          </a:p>
-          <a:p>
-            <a:pPr>
-              <a:lnSpc>
-                <a:spcPct val="108000"/>
-              </a:lnSpc>
-              <a:spcAft>
-                <a:spcPts val="1000"/>
-              </a:spcAft>
-            </a:pPr>
-            <a:r>
-              <a:rPr sz="1400">
-                <a:solidFill>
-                  <a:srgbClr val="1D1D1F"/>
-                </a:solidFill>
-                <a:latin typeface="Helvetica Neue"/>
-              </a:rPr>
-              <a:t>-  04 Levels &amp; Momentum: bill_sum/mean/std, amt_sum/mean/std, bill_growth, amt_over_limit, log_limit, restores the absolute scale the ratio families strip out, needed for the neural models (trees are scale-invariant and don't need it).</a:t>
-            </a:r>
-          </a:p>
-          <a:p>
-            <a:pPr>
-              <a:lnSpc>
-                <a:spcPct val="108000"/>
-              </a:lnSpc>
-              <a:spcAft>
-                <a:spcPts val="1000"/>
-              </a:spcAft>
-            </a:pPr>
-            <a:r>
-              <a:rPr sz="1400">
-                <a:solidFill>
-                  <a:srgbClr val="1D1D1F"/>
-                </a:solidFill>
-                <a:latin typeface="Helvetica Neue"/>
-              </a:rPr>
-              <a:t>-  05 Spending Decomposition (the largest gain of the project, +0.00046 OOF / +0.00173 hidden test): spend_t = BILL_t - BILL_(t+1) + PAY_AMT_t, plus spend1-5, spend_mean/max/std/trend, n_months_no_spend, spend_minus_paid, months_spend_gt_paid.</a:t>
-            </a:r>
-          </a:p>
-          <a:p>
-            <a:pPr>
-              <a:lnSpc>
-                <a:spcPct val="108000"/>
-              </a:lnSpc>
-              <a:spcAft>
-                <a:spcPts val="1000"/>
-              </a:spcAft>
-            </a:pPr>
-            <a:r>
-              <a:rPr sz="1400">
-                <a:solidFill>
-                  <a:srgbClr val="1D1D1F"/>
-                </a:solidFill>
-                <a:latin typeface="Helvetica Neue"/>
-              </a:rPr>
-              <a:t>-  06 Minimum-Payment Behaviour: min_pay_ratio_mean/min (distance from the assumed 10% minimum due), months_paid_about_min, months_paid_under_min.</a:t>
-            </a:r>
-          </a:p>
-          <a:p>
-            <a:pPr>
-              <a:lnSpc>
-                <a:spcPct val="108000"/>
-              </a:lnSpc>
-              <a:spcAft>
-                <a:spcPts val="1000"/>
-              </a:spcAft>
-            </a:pPr>
-            <a:r>
-              <a:rPr sz="1400">
-                <a:solidFill>
-                  <a:srgbClr val="1D1D1F"/>
-                </a:solidFill>
-                <a:latin typeface="Helvetica Neue"/>
-              </a:rPr>
-              <a:t>-  Six additional feature families were tried and rejected; see the main Feature Engineering slide for their measured deltas.</a:t>
-            </a:r>
-          </a:p>
-        </p:txBody>
-      </p:sp>
-    </p:spTree>
-  </p:cSld>
-  <p:clrMapOvr>
-    <a:masterClrMapping/>
-  </p:clrMapOvr>
-</p:sld>
-</file>
-
 <file path=ppt/slides/slide2.xml><?xml version="1.0" encoding="utf-8"?>
 <p:sld xmlns:a="http://schemas.openxmlformats.org/drawingml/2006/main" xmlns:p="http://schemas.openxmlformats.org/presentationml/2006/main" xmlns:r="http://schemas.openxmlformats.org/officeDocument/2006/relationships">
   <p:cSld>
@@ -13869,7 +13591,7 @@
                 </a:solidFill>
                 <a:latin typeface="Helvetica Neue"/>
               </a:rPr>
-              <a:t>Model comparison and blend weights</a:t>
+              <a:t>Full hyperparameters &amp; fit counts</a:t>
             </a:r>
           </a:p>
         </p:txBody>
@@ -13911,7 +13633,7 @@
                 </a:solidFill>
                 <a:latin typeface="Helvetica Neue"/>
               </a:rPr>
-              <a:t>-  Ten model families tested; three earned blend weight (LightGBM 0.45, GRU 0.30, TabPFN 0.25).</a:t>
+              <a:t>-  LightGBM (strongest single model; reads all 81 features as a flat snapshot): learning_rate 0.03, num_leaves 12, max_depth 4, min_child_samples 100, reg_lambda 30.0, feature_fraction 0.5, seeds (0,1,2), 90 fits + 3-seed refit.</a:t>
             </a:r>
           </a:p>
           <a:p>
@@ -13930,7 +13652,7 @@
                 </a:solidFill>
                 <a:latin typeface="Helvetica Neue"/>
               </a:rPr>
-              <a:t>-  Rejected at weight 0.00: survival/hazard (0.42260 OOF, worsened hidden test), sequence+spend channel (0.42426), 1D-CNN (0.42601, 0.9924 correlated with GRU), autoencoder (0.42685), MLP (0.42882), CatBoost, ExtraTrees, logistic regression, multi-task GRU.</a:t>
+              <a:t>-  GRU (reads six months in order; the only model tuned from scratch this project): 2-layer bi-GRU, hidden size 32, dropout 0.4, Adam lr 2e-3, batch 512, max epochs 120/patience 12, seeds range(5), 150 fits + 5-seed refit.</a:t>
             </a:r>
           </a:p>
           <a:p>
@@ -13949,7 +13671,7 @@
                 </a:solidFill>
                 <a:latin typeface="Helvetica Neue"/>
               </a:rPr>
-              <a:t>-  135 LightGBM configurations across 3 sweeps (40 coarse, 60 fine, 1 blend-scored); best challenger beat the incumbent by only 0.00004, well below the noise floor.</a:t>
+              <a:t>-  TabPFN (pretrained prior; zero parameters fit to this data): n_estimators 4, balance_probabilities False, device cpu, context 19,200/fold, 30 fits + 3-seed refit.</a:t>
             </a:r>
           </a:p>
           <a:p>
@@ -13968,7 +13690,26 @@
                 </a:solidFill>
                 <a:latin typeface="Helvetica Neue"/>
               </a:rPr>
-              <a:t>-  Correlation is not the selection criterion: logistic regression was the most decorrelated model (0.948 vs. LightGBM) yet received weight 0.00. GRU earned 0.30 at a higher correlation of 0.983, what matters is whether disagreement carries signal.</a:t>
+              <a:t>-  Correlation is not the selection criterion: logistic regression was the most decorrelated model tested (0.948 vs. LightGBM) yet received weight 0.00. GRU earned 0.30 at a higher correlation of 0.983, what matters is whether disagreement carries signal.</a:t>
+            </a:r>
+          </a:p>
+          <a:p>
+            <a:pPr>
+              <a:lnSpc>
+                <a:spcPct val="108000"/>
+              </a:lnSpc>
+              <a:spcAft>
+                <a:spcPts val="1000"/>
+              </a:spcAft>
+            </a:pPr>
+            <a:r>
+              <a:rPr sz="1650">
+                <a:solidFill>
+                  <a:srgbClr val="1D1D1F"/>
+                </a:solidFill>
+                <a:latin typeface="Helvetica Neue"/>
+              </a:rPr>
+              <a:t>-  Totals: 270 cross-validated fits plus 11 full-data refits stand behind each submitted probability. TabPFN also requires a Prior Labs licence and API token.</a:t>
             </a:r>
           </a:p>
         </p:txBody>
